--- a/SantanderCS/report/ppt/산탄데르_ppt_수정중_251225.pptx
+++ b/SantanderCS/report/ppt/산탄데르_ppt_수정중_251225.pptx
@@ -20,7 +20,9 @@
     <p:sldId id="269" r:id="rId14"/>
     <p:sldId id="270" r:id="rId15"/>
     <p:sldId id="271" r:id="rId16"/>
-    <p:sldId id="258" r:id="rId17"/>
+    <p:sldId id="272" r:id="rId17"/>
+    <p:sldId id="273" r:id="rId18"/>
+    <p:sldId id="258" r:id="rId19"/>
   </p:sldIdLst>
   <p:sldSz cx="12192000" cy="6858000"/>
   <p:notesSz cx="6858000" cy="9144000"/>
@@ -267,7 +269,7 @@
           <a:p>
             <a:fld id="{2566825D-2B69-4989-8861-A6901ABADB6C}" type="datetimeFigureOut">
               <a:rPr lang="ko-KR" altLang="en-US" smtClean="0"/>
-              <a:t>2025-12-14</a:t>
+              <a:t>2025-12-15</a:t>
             </a:fld>
             <a:endParaRPr lang="ko-KR" altLang="en-US"/>
           </a:p>
@@ -435,7 +437,7 @@
           <a:p>
             <a:fld id="{2566825D-2B69-4989-8861-A6901ABADB6C}" type="datetimeFigureOut">
               <a:rPr lang="ko-KR" altLang="en-US" smtClean="0"/>
-              <a:t>2025-12-14</a:t>
+              <a:t>2025-12-15</a:t>
             </a:fld>
             <a:endParaRPr lang="ko-KR" altLang="en-US"/>
           </a:p>
@@ -613,7 +615,7 @@
           <a:p>
             <a:fld id="{2566825D-2B69-4989-8861-A6901ABADB6C}" type="datetimeFigureOut">
               <a:rPr lang="ko-KR" altLang="en-US" smtClean="0"/>
-              <a:t>2025-12-14</a:t>
+              <a:t>2025-12-15</a:t>
             </a:fld>
             <a:endParaRPr lang="ko-KR" altLang="en-US"/>
           </a:p>
@@ -781,7 +783,7 @@
           <a:p>
             <a:fld id="{2566825D-2B69-4989-8861-A6901ABADB6C}" type="datetimeFigureOut">
               <a:rPr lang="ko-KR" altLang="en-US" smtClean="0"/>
-              <a:t>2025-12-14</a:t>
+              <a:t>2025-12-15</a:t>
             </a:fld>
             <a:endParaRPr lang="ko-KR" altLang="en-US"/>
           </a:p>
@@ -1026,7 +1028,7 @@
           <a:p>
             <a:fld id="{2566825D-2B69-4989-8861-A6901ABADB6C}" type="datetimeFigureOut">
               <a:rPr lang="ko-KR" altLang="en-US" smtClean="0"/>
-              <a:t>2025-12-14</a:t>
+              <a:t>2025-12-15</a:t>
             </a:fld>
             <a:endParaRPr lang="ko-KR" altLang="en-US"/>
           </a:p>
@@ -1255,7 +1257,7 @@
           <a:p>
             <a:fld id="{2566825D-2B69-4989-8861-A6901ABADB6C}" type="datetimeFigureOut">
               <a:rPr lang="ko-KR" altLang="en-US" smtClean="0"/>
-              <a:t>2025-12-14</a:t>
+              <a:t>2025-12-15</a:t>
             </a:fld>
             <a:endParaRPr lang="ko-KR" altLang="en-US"/>
           </a:p>
@@ -1619,7 +1621,7 @@
           <a:p>
             <a:fld id="{2566825D-2B69-4989-8861-A6901ABADB6C}" type="datetimeFigureOut">
               <a:rPr lang="ko-KR" altLang="en-US" smtClean="0"/>
-              <a:t>2025-12-14</a:t>
+              <a:t>2025-12-15</a:t>
             </a:fld>
             <a:endParaRPr lang="ko-KR" altLang="en-US"/>
           </a:p>
@@ -1736,7 +1738,7 @@
           <a:p>
             <a:fld id="{2566825D-2B69-4989-8861-A6901ABADB6C}" type="datetimeFigureOut">
               <a:rPr lang="ko-KR" altLang="en-US" smtClean="0"/>
-              <a:t>2025-12-14</a:t>
+              <a:t>2025-12-15</a:t>
             </a:fld>
             <a:endParaRPr lang="ko-KR" altLang="en-US"/>
           </a:p>
@@ -1831,7 +1833,7 @@
           <a:p>
             <a:fld id="{2566825D-2B69-4989-8861-A6901ABADB6C}" type="datetimeFigureOut">
               <a:rPr lang="ko-KR" altLang="en-US" smtClean="0"/>
-              <a:t>2025-12-14</a:t>
+              <a:t>2025-12-15</a:t>
             </a:fld>
             <a:endParaRPr lang="ko-KR" altLang="en-US"/>
           </a:p>
@@ -2106,7 +2108,7 @@
           <a:p>
             <a:fld id="{2566825D-2B69-4989-8861-A6901ABADB6C}" type="datetimeFigureOut">
               <a:rPr lang="ko-KR" altLang="en-US" smtClean="0"/>
-              <a:t>2025-12-14</a:t>
+              <a:t>2025-12-15</a:t>
             </a:fld>
             <a:endParaRPr lang="ko-KR" altLang="en-US"/>
           </a:p>
@@ -2358,7 +2360,7 @@
           <a:p>
             <a:fld id="{2566825D-2B69-4989-8861-A6901ABADB6C}" type="datetimeFigureOut">
               <a:rPr lang="ko-KR" altLang="en-US" smtClean="0"/>
-              <a:t>2025-12-14</a:t>
+              <a:t>2025-12-15</a:t>
             </a:fld>
             <a:endParaRPr lang="ko-KR" altLang="en-US"/>
           </a:p>
@@ -2569,7 +2571,7 @@
           <a:p>
             <a:fld id="{2566825D-2B69-4989-8861-A6901ABADB6C}" type="datetimeFigureOut">
               <a:rPr lang="ko-KR" altLang="en-US" smtClean="0"/>
-              <a:t>2025-12-14</a:t>
+              <a:t>2025-12-15</a:t>
             </a:fld>
             <a:endParaRPr lang="ko-KR" altLang="en-US"/>
           </a:p>
@@ -12293,7 +12295,7 @@
         <p:spPr>
           <a:xfrm>
             <a:off x="613832" y="941917"/>
-            <a:ext cx="10816167" cy="1052083"/>
+            <a:ext cx="10816167" cy="1352165"/>
           </a:xfrm>
           <a:prstGeom prst="rect">
             <a:avLst/>
@@ -12330,39 +12332,7 @@
                 <a:ea typeface="Microsoft GothicNeo"/>
                 <a:cs typeface="Microsoft GothicNeo"/>
               </a:rPr>
-              <a:t>인코딩</a:t>
-            </a:r>
-            <a:r>
-              <a:rPr lang="en-US" altLang="ko-KR" dirty="0">
-                <a:latin typeface="Microsoft GothicNeo"/>
-                <a:ea typeface="Microsoft GothicNeo"/>
-                <a:cs typeface="Microsoft GothicNeo"/>
-              </a:rPr>
-              <a:t>, </a:t>
-            </a:r>
-            <a:r>
-              <a:rPr lang="ko-KR" altLang="en-US" dirty="0">
-                <a:latin typeface="Microsoft GothicNeo"/>
-                <a:ea typeface="Microsoft GothicNeo"/>
-                <a:cs typeface="Microsoft GothicNeo"/>
-              </a:rPr>
-              <a:t>스케일링</a:t>
-            </a:r>
-            <a:r>
-              <a:rPr lang="en-US" altLang="ko-KR" dirty="0">
-                <a:latin typeface="Microsoft GothicNeo"/>
-                <a:ea typeface="Microsoft GothicNeo"/>
-                <a:cs typeface="Microsoft GothicNeo"/>
-              </a:rPr>
-              <a:t>, </a:t>
-            </a:r>
-            <a:r>
-              <a:rPr lang="ko-KR" altLang="en-US" dirty="0">
-                <a:latin typeface="Microsoft GothicNeo"/>
-                <a:ea typeface="Microsoft GothicNeo"/>
-                <a:cs typeface="Microsoft GothicNeo"/>
-              </a:rPr>
-              <a:t>최종 요약</a:t>
+              <a:t>모든 피처 스케일링을 통한 정규화 작업 실시 </a:t>
             </a:r>
           </a:p>
           <a:p>
@@ -12374,28 +12344,34 @@
               <a:buChar char="§"/>
             </a:pPr>
             <a:r>
-              <a:rPr lang="en-US" altLang="ko-KR" sz="1300" b="1" dirty="0">
-                <a:latin typeface="Microsoft GothicNeo"/>
-                <a:ea typeface="Microsoft GothicNeo"/>
-                <a:cs typeface="Microsoft GothicNeo"/>
-              </a:rPr>
-              <a:t>(</a:t>
-            </a:r>
-            <a:r>
-              <a:rPr lang="ko-KR" altLang="en-US" sz="1300" b="1" dirty="0" err="1">
-                <a:latin typeface="Microsoft GothicNeo"/>
-                <a:ea typeface="Microsoft GothicNeo"/>
-                <a:cs typeface="Microsoft GothicNeo"/>
-              </a:rPr>
-              <a:t>ㅇㅇㅇ</a:t>
-            </a:r>
-            <a:r>
-              <a:rPr lang="en-US" altLang="ko-KR" sz="1300" b="1" dirty="0">
-                <a:latin typeface="Microsoft GothicNeo"/>
-                <a:ea typeface="Microsoft GothicNeo"/>
-                <a:cs typeface="Microsoft GothicNeo"/>
-              </a:rPr>
-              <a:t>)</a:t>
+              <a:rPr lang="ko-KR" altLang="en-US" sz="1300" dirty="0">
+                <a:latin typeface="Microsoft GothicNeo"/>
+                <a:ea typeface="Microsoft GothicNeo"/>
+                <a:cs typeface="Microsoft GothicNeo"/>
+              </a:rPr>
+              <a:t>모델 간 공정한 비교를 위한 </a:t>
+            </a:r>
+            <a:r>
+              <a:rPr lang="ko-KR" altLang="en-US" sz="1300" dirty="0">
+                <a:solidFill>
+                  <a:srgbClr val="C00000"/>
+                </a:solidFill>
+                <a:latin typeface="Microsoft GothicNeo"/>
+                <a:ea typeface="Microsoft GothicNeo"/>
+                <a:cs typeface="Microsoft GothicNeo"/>
+              </a:rPr>
+              <a:t>모든 피처에 </a:t>
+            </a:r>
+            <a:r>
+              <a:rPr lang="en-US" altLang="ko-KR" sz="1300" dirty="0" err="1">
+                <a:solidFill>
+                  <a:srgbClr val="C00000"/>
+                </a:solidFill>
+                <a:latin typeface="Microsoft GothicNeo"/>
+                <a:ea typeface="Microsoft GothicNeo"/>
+                <a:cs typeface="Microsoft GothicNeo"/>
+              </a:rPr>
+              <a:t>StandardScaler</a:t>
             </a:r>
             <a:r>
               <a:rPr lang="en-US" altLang="ko-KR" sz="1300" dirty="0">
@@ -12406,18 +12382,43 @@
               <a:t> </a:t>
             </a:r>
             <a:r>
-              <a:rPr lang="ko-KR" altLang="en-US" sz="1300" dirty="0" err="1">
-                <a:latin typeface="Microsoft GothicNeo"/>
-                <a:ea typeface="Microsoft GothicNeo"/>
-                <a:cs typeface="Microsoft GothicNeo"/>
-              </a:rPr>
-              <a:t>ㅇㅇㅇ</a:t>
+              <a:rPr lang="ko-KR" altLang="en-US" sz="1300" dirty="0">
+                <a:latin typeface="Microsoft GothicNeo"/>
+                <a:ea typeface="Microsoft GothicNeo"/>
+                <a:cs typeface="Microsoft GothicNeo"/>
+              </a:rPr>
+              <a:t>적용</a:t>
             </a:r>
             <a:endParaRPr lang="en-US" altLang="ko-KR" sz="1300" dirty="0">
               <a:latin typeface="Microsoft GothicNeo"/>
               <a:ea typeface="Microsoft GothicNeo"/>
               <a:cs typeface="Microsoft GothicNeo"/>
             </a:endParaRPr>
+          </a:p>
+          <a:p>
+            <a:pPr marL="400050" lvl="2" indent="228600">
+              <a:lnSpc>
+                <a:spcPct val="150000"/>
+              </a:lnSpc>
+              <a:buFont typeface="Wingdings,Sans-Serif"/>
+              <a:buChar char="§"/>
+            </a:pPr>
+            <a:r>
+              <a:rPr lang="ko-KR" altLang="en-US" sz="1300" dirty="0">
+                <a:latin typeface="Microsoft GothicNeo"/>
+                <a:ea typeface="Microsoft GothicNeo"/>
+                <a:cs typeface="Microsoft GothicNeo"/>
+              </a:rPr>
+              <a:t>추가적인 인코딩 작업은 수행하지 않았음</a:t>
+            </a:r>
+            <a:r>
+              <a:rPr lang="en-US" altLang="ko-KR" sz="1300" dirty="0">
+                <a:latin typeface="Microsoft GothicNeo"/>
+                <a:ea typeface="Microsoft GothicNeo"/>
+                <a:cs typeface="Microsoft GothicNeo"/>
+              </a:rPr>
+              <a:t>(One-Hot Encoding, Label Encoding X)</a:t>
+            </a:r>
           </a:p>
           <a:p>
             <a:pPr marL="800100" lvl="3" indent="-228600">
@@ -12428,18 +12429,37 @@
               <a:buChar char="-"/>
             </a:pPr>
             <a:r>
+              <a:rPr lang="ko-KR" altLang="en-US" sz="1200" dirty="0">
+                <a:latin typeface="Microsoft GothicNeo"/>
+                <a:ea typeface="Microsoft GothicNeo"/>
+                <a:cs typeface="Microsoft GothicNeo"/>
+              </a:rPr>
+              <a:t>스케일링을 통해 트리계열 모델들은 변수 스케일에 민감하지 않지만</a:t>
+            </a:r>
+            <a:r>
+              <a:rPr lang="en-US" altLang="ko-KR" sz="1200" dirty="0">
+                <a:latin typeface="Microsoft GothicNeo"/>
+                <a:ea typeface="Microsoft GothicNeo"/>
+                <a:cs typeface="Microsoft GothicNeo"/>
+              </a:rPr>
+              <a:t>, </a:t>
+            </a:r>
+            <a:r>
               <a:rPr lang="ko-KR" altLang="en-US" sz="1200" dirty="0" err="1">
                 <a:latin typeface="Microsoft GothicNeo"/>
                 <a:ea typeface="Microsoft GothicNeo"/>
                 <a:cs typeface="Microsoft GothicNeo"/>
               </a:rPr>
-              <a:t>ㅇㅇㅇ</a:t>
-            </a:r>
-            <a:endParaRPr lang="ko-KR" altLang="en-US" sz="1200" dirty="0">
-              <a:latin typeface="Microsoft GothicNeo"/>
-              <a:ea typeface="Microsoft GothicNeo"/>
-              <a:cs typeface="Microsoft GothicNeo"/>
-            </a:endParaRPr>
+              <a:t>입력값</a:t>
+            </a:r>
+            <a:r>
+              <a:rPr lang="ko-KR" altLang="en-US" sz="1200" dirty="0">
+                <a:latin typeface="Microsoft GothicNeo"/>
+                <a:ea typeface="Microsoft GothicNeo"/>
+                <a:cs typeface="Microsoft GothicNeo"/>
+              </a:rPr>
+              <a:t> 크기 차이에 영향을 받는 회귀 모델과 공정한 비교 가능</a:t>
+            </a:r>
           </a:p>
         </p:txBody>
       </p:sp>
@@ -12449,6 +12469,1536 @@
             <a:extLst>
               <a:ext uri="{FF2B5EF4-FFF2-40B4-BE49-F238E27FC236}">
                 <a16:creationId xmlns:a16="http://schemas.microsoft.com/office/drawing/2014/main" id="{4152E70C-2933-C9BE-9F7C-C20AAF55CC72}"/>
+              </a:ext>
+            </a:extLst>
+          </p:cNvPr>
+          <p:cNvSpPr/>
+          <p:nvPr/>
+        </p:nvSpPr>
+        <p:spPr>
+          <a:xfrm>
+            <a:off x="444501" y="1026583"/>
+            <a:ext cx="62494" cy="3092744"/>
+          </a:xfrm>
+          <a:prstGeom prst="rect">
+            <a:avLst/>
+          </a:prstGeom>
+          <a:solidFill>
+            <a:srgbClr val="C00000"/>
+          </a:solidFill>
+          <a:ln>
+            <a:noFill/>
+          </a:ln>
+        </p:spPr>
+        <p:style>
+          <a:lnRef idx="2">
+            <a:schemeClr val="accent1">
+              <a:shade val="15000"/>
+            </a:schemeClr>
+          </a:lnRef>
+          <a:fillRef idx="1">
+            <a:schemeClr val="accent1"/>
+          </a:fillRef>
+          <a:effectRef idx="0">
+            <a:schemeClr val="accent1"/>
+          </a:effectRef>
+          <a:fontRef idx="minor">
+            <a:schemeClr val="lt1"/>
+          </a:fontRef>
+        </p:style>
+        <p:txBody>
+          <a:bodyPr rtlCol="0" anchor="ctr"/>
+          <a:lstStyle/>
+          <a:p>
+            <a:pPr algn="ctr"/>
+            <a:endParaRPr lang="ko-KR" altLang="en-US"/>
+          </a:p>
+        </p:txBody>
+      </p:sp>
+      <p:pic>
+        <p:nvPicPr>
+          <p:cNvPr id="5" name="그림 4" descr="File:Santander Logo.PNG - Wikimedia Commons">
+            <a:extLst>
+              <a:ext uri="{FF2B5EF4-FFF2-40B4-BE49-F238E27FC236}">
+                <a16:creationId xmlns:a16="http://schemas.microsoft.com/office/drawing/2014/main" id="{82924371-5262-D64D-F2BD-343C18DC272B}"/>
+              </a:ext>
+            </a:extLst>
+          </p:cNvPr>
+          <p:cNvPicPr>
+            <a:picLocks noChangeAspect="1"/>
+          </p:cNvPicPr>
+          <p:nvPr/>
+        </p:nvPicPr>
+        <p:blipFill>
+          <a:blip r:embed="rId2"/>
+          <a:stretch>
+            <a:fillRect/>
+          </a:stretch>
+        </p:blipFill>
+        <p:spPr>
+          <a:xfrm>
+            <a:off x="3" y="6197079"/>
+            <a:ext cx="1767252" cy="662893"/>
+          </a:xfrm>
+          <a:prstGeom prst="rect">
+            <a:avLst/>
+          </a:prstGeom>
+        </p:spPr>
+      </p:pic>
+      <p:sp>
+        <p:nvSpPr>
+          <p:cNvPr id="3" name="TextBox 2">
+            <a:extLst>
+              <a:ext uri="{FF2B5EF4-FFF2-40B4-BE49-F238E27FC236}">
+                <a16:creationId xmlns:a16="http://schemas.microsoft.com/office/drawing/2014/main" id="{92E5419D-7618-A5F7-E24D-127E2BA887B1}"/>
+              </a:ext>
+            </a:extLst>
+          </p:cNvPr>
+          <p:cNvSpPr txBox="1"/>
+          <p:nvPr/>
+        </p:nvSpPr>
+        <p:spPr>
+          <a:xfrm>
+            <a:off x="613832" y="2579029"/>
+            <a:ext cx="10816167" cy="1629164"/>
+          </a:xfrm>
+          <a:prstGeom prst="rect">
+            <a:avLst/>
+          </a:prstGeom>
+          <a:noFill/>
+        </p:spPr>
+        <p:txBody>
+          <a:bodyPr rot="0" spcFirstLastPara="0" vertOverflow="overflow" horzOverflow="overflow" vert="horz" wrap="square" lIns="91440" tIns="45720" rIns="91440" bIns="45720" numCol="1" spcCol="0" rtlCol="0" fromWordArt="0" anchor="t" anchorCtr="0" forceAA="0" compatLnSpc="1">
+            <a:prstTxWarp prst="textNoShape">
+              <a:avLst/>
+            </a:prstTxWarp>
+            <a:spAutoFit/>
+          </a:bodyPr>
+          <a:lstStyle/>
+          <a:p>
+            <a:pPr marL="285750" indent="-285750">
+              <a:lnSpc>
+                <a:spcPct val="150000"/>
+              </a:lnSpc>
+              <a:buFont typeface="Wingdings"/>
+              <a:buChar char="q"/>
+            </a:pPr>
+            <a:r>
+              <a:rPr lang="en-US" altLang="ko-KR" dirty="0">
+                <a:latin typeface="Microsoft GothicNeo"/>
+                <a:ea typeface="Microsoft GothicNeo"/>
+                <a:cs typeface="Microsoft GothicNeo"/>
+              </a:rPr>
+              <a:t> </a:t>
+            </a:r>
+            <a:r>
+              <a:rPr lang="ko-KR" altLang="en-US" dirty="0">
+                <a:latin typeface="Microsoft GothicNeo"/>
+                <a:ea typeface="Microsoft GothicNeo"/>
+                <a:cs typeface="Microsoft GothicNeo"/>
+              </a:rPr>
+              <a:t>단계적 전처리를 통한 최종 </a:t>
+            </a:r>
+            <a:r>
+              <a:rPr lang="en-US" altLang="ko-KR" dirty="0">
+                <a:latin typeface="Microsoft GothicNeo"/>
+                <a:ea typeface="Microsoft GothicNeo"/>
+                <a:cs typeface="Microsoft GothicNeo"/>
+              </a:rPr>
+              <a:t>Feature Selection</a:t>
+            </a:r>
+            <a:r>
+              <a:rPr lang="ko-KR" altLang="en-US" dirty="0">
+                <a:latin typeface="Microsoft GothicNeo"/>
+                <a:ea typeface="Microsoft GothicNeo"/>
+                <a:cs typeface="Microsoft GothicNeo"/>
+              </a:rPr>
+              <a:t> 요약 </a:t>
+            </a:r>
+          </a:p>
+          <a:p>
+            <a:pPr marL="400050" lvl="2" indent="228600">
+              <a:lnSpc>
+                <a:spcPct val="150000"/>
+              </a:lnSpc>
+              <a:buFont typeface="Wingdings,Sans-Serif"/>
+              <a:buChar char="§"/>
+            </a:pPr>
+            <a:r>
+              <a:rPr lang="ko-KR" altLang="en-US" sz="1300" dirty="0">
+                <a:latin typeface="Microsoft GothicNeo"/>
+                <a:ea typeface="Microsoft GothicNeo"/>
+                <a:cs typeface="Microsoft GothicNeo"/>
+              </a:rPr>
+              <a:t>원본 데이터</a:t>
+            </a:r>
+            <a:r>
+              <a:rPr lang="en-US" altLang="ko-KR" sz="1300" dirty="0">
+                <a:latin typeface="Microsoft GothicNeo"/>
+                <a:ea typeface="Microsoft GothicNeo"/>
+                <a:cs typeface="Microsoft GothicNeo"/>
+              </a:rPr>
+              <a:t>(371</a:t>
+            </a:r>
+            <a:r>
+              <a:rPr lang="ko-KR" altLang="en-US" sz="1300" dirty="0">
+                <a:latin typeface="Microsoft GothicNeo"/>
+                <a:ea typeface="Microsoft GothicNeo"/>
+                <a:cs typeface="Microsoft GothicNeo"/>
+              </a:rPr>
+              <a:t>개 피처</a:t>
+            </a:r>
+            <a:r>
+              <a:rPr lang="en-US" altLang="ko-KR" sz="1300" dirty="0">
+                <a:latin typeface="Microsoft GothicNeo"/>
+                <a:ea typeface="Microsoft GothicNeo"/>
+                <a:cs typeface="Microsoft GothicNeo"/>
+              </a:rPr>
+              <a:t>) </a:t>
+            </a:r>
+            <a:r>
+              <a:rPr lang="ko-KR" altLang="en-US" sz="1300" dirty="0">
+                <a:latin typeface="Microsoft GothicNeo"/>
+                <a:ea typeface="Microsoft GothicNeo"/>
+                <a:cs typeface="Microsoft GothicNeo"/>
+              </a:rPr>
+              <a:t>중 불필요하거나</a:t>
+            </a:r>
+            <a:r>
+              <a:rPr lang="en-US" altLang="ko-KR" sz="1300" dirty="0">
+                <a:latin typeface="Microsoft GothicNeo"/>
+                <a:ea typeface="Microsoft GothicNeo"/>
+                <a:cs typeface="Microsoft GothicNeo"/>
+              </a:rPr>
+              <a:t>, </a:t>
+            </a:r>
+            <a:r>
+              <a:rPr lang="ko-KR" altLang="en-US" sz="1300" dirty="0">
+                <a:latin typeface="Microsoft GothicNeo"/>
+                <a:ea typeface="Microsoft GothicNeo"/>
+                <a:cs typeface="Microsoft GothicNeo"/>
+              </a:rPr>
+              <a:t>품질저하 유발 요소 제거</a:t>
+            </a:r>
+            <a:endParaRPr lang="en-US" altLang="ko-KR" sz="1300" dirty="0">
+              <a:latin typeface="Microsoft GothicNeo"/>
+              <a:ea typeface="Microsoft GothicNeo"/>
+              <a:cs typeface="Microsoft GothicNeo"/>
+            </a:endParaRPr>
+          </a:p>
+          <a:p>
+            <a:pPr marL="400050" lvl="2" indent="228600">
+              <a:lnSpc>
+                <a:spcPct val="150000"/>
+              </a:lnSpc>
+              <a:buFont typeface="Wingdings,Sans-Serif"/>
+              <a:buChar char="§"/>
+            </a:pPr>
+            <a:r>
+              <a:rPr lang="ko-KR" altLang="en-US" sz="1300" b="1" dirty="0">
+                <a:solidFill>
+                  <a:srgbClr val="C00000"/>
+                </a:solidFill>
+                <a:latin typeface="Microsoft GothicNeo"/>
+                <a:ea typeface="Microsoft GothicNeo"/>
+                <a:cs typeface="Microsoft GothicNeo"/>
+              </a:rPr>
+              <a:t>최종적 </a:t>
+            </a:r>
+            <a:r>
+              <a:rPr lang="en-US" altLang="ko-KR" sz="1300" b="1" dirty="0">
+                <a:solidFill>
+                  <a:srgbClr val="C00000"/>
+                </a:solidFill>
+                <a:latin typeface="Microsoft GothicNeo"/>
+                <a:ea typeface="Microsoft GothicNeo"/>
+                <a:cs typeface="Microsoft GothicNeo"/>
+              </a:rPr>
+              <a:t>96</a:t>
+            </a:r>
+            <a:r>
+              <a:rPr lang="ko-KR" altLang="en-US" sz="1300" b="1" dirty="0">
+                <a:solidFill>
+                  <a:srgbClr val="C00000"/>
+                </a:solidFill>
+                <a:latin typeface="Microsoft GothicNeo"/>
+                <a:ea typeface="Microsoft GothicNeo"/>
+                <a:cs typeface="Microsoft GothicNeo"/>
+              </a:rPr>
+              <a:t>개 핵심 피처 선정 </a:t>
+            </a:r>
+            <a:endParaRPr lang="en-US" altLang="ko-KR" sz="1300" b="1" dirty="0">
+              <a:solidFill>
+                <a:srgbClr val="C00000"/>
+              </a:solidFill>
+              <a:latin typeface="Microsoft GothicNeo"/>
+              <a:ea typeface="Microsoft GothicNeo"/>
+              <a:cs typeface="Microsoft GothicNeo"/>
+            </a:endParaRPr>
+          </a:p>
+          <a:p>
+            <a:pPr marL="800100" lvl="3" indent="-228600">
+              <a:lnSpc>
+                <a:spcPct val="150000"/>
+              </a:lnSpc>
+              <a:buFont typeface="Calibri"/>
+              <a:buChar char="-"/>
+            </a:pPr>
+            <a:r>
+              <a:rPr lang="ko-KR" altLang="en-US" sz="1200" dirty="0">
+                <a:latin typeface="Microsoft GothicNeo"/>
+                <a:ea typeface="Microsoft GothicNeo"/>
+                <a:cs typeface="Microsoft GothicNeo"/>
+              </a:rPr>
+              <a:t>모델 학습 효율성</a:t>
+            </a:r>
+            <a:r>
+              <a:rPr lang="en-US" altLang="ko-KR" sz="1200" dirty="0">
+                <a:latin typeface="Microsoft GothicNeo"/>
+                <a:ea typeface="Microsoft GothicNeo"/>
+                <a:cs typeface="Microsoft GothicNeo"/>
+              </a:rPr>
+              <a:t> </a:t>
+            </a:r>
+            <a:r>
+              <a:rPr lang="ko-KR" altLang="en-US" sz="1200" dirty="0">
+                <a:latin typeface="Microsoft GothicNeo"/>
+                <a:ea typeface="Microsoft GothicNeo"/>
+                <a:cs typeface="Microsoft GothicNeo"/>
+              </a:rPr>
+              <a:t>향상</a:t>
+            </a:r>
+            <a:endParaRPr lang="en-US" altLang="ko-KR" sz="1200" dirty="0">
+              <a:latin typeface="Microsoft GothicNeo"/>
+              <a:ea typeface="Microsoft GothicNeo"/>
+              <a:cs typeface="Microsoft GothicNeo"/>
+            </a:endParaRPr>
+          </a:p>
+          <a:p>
+            <a:pPr marL="800100" lvl="3" indent="-228600">
+              <a:lnSpc>
+                <a:spcPct val="150000"/>
+              </a:lnSpc>
+              <a:buFont typeface="Calibri"/>
+              <a:buChar char="-"/>
+            </a:pPr>
+            <a:r>
+              <a:rPr lang="ko-KR" altLang="en-US" sz="1200" dirty="0" err="1">
+                <a:latin typeface="Microsoft GothicNeo"/>
+                <a:ea typeface="Microsoft GothicNeo"/>
+                <a:cs typeface="Microsoft GothicNeo"/>
+              </a:rPr>
+              <a:t>과적합</a:t>
+            </a:r>
+            <a:r>
+              <a:rPr lang="ko-KR" altLang="en-US" sz="1200" dirty="0">
+                <a:latin typeface="Microsoft GothicNeo"/>
+                <a:ea typeface="Microsoft GothicNeo"/>
+                <a:cs typeface="Microsoft GothicNeo"/>
+              </a:rPr>
+              <a:t> 방지와 해석 가능성 제고 기여</a:t>
+            </a:r>
+          </a:p>
+        </p:txBody>
+      </p:sp>
+      <p:sp>
+        <p:nvSpPr>
+          <p:cNvPr id="6" name="TextBox 5">
+            <a:extLst>
+              <a:ext uri="{FF2B5EF4-FFF2-40B4-BE49-F238E27FC236}">
+                <a16:creationId xmlns:a16="http://schemas.microsoft.com/office/drawing/2014/main" id="{143E1F07-065D-6DAE-E797-FB5C8260DD65}"/>
+              </a:ext>
+            </a:extLst>
+          </p:cNvPr>
+          <p:cNvSpPr txBox="1"/>
+          <p:nvPr/>
+        </p:nvSpPr>
+        <p:spPr>
+          <a:xfrm>
+            <a:off x="2884885" y="4493140"/>
+            <a:ext cx="6422230" cy="261610"/>
+          </a:xfrm>
+          <a:prstGeom prst="rect">
+            <a:avLst/>
+          </a:prstGeom>
+          <a:noFill/>
+        </p:spPr>
+        <p:txBody>
+          <a:bodyPr wrap="square">
+            <a:spAutoFit/>
+          </a:bodyPr>
+          <a:lstStyle/>
+          <a:p>
+            <a:pPr algn="ctr"/>
+            <a:r>
+              <a:rPr lang="en-US" altLang="ko-KR" sz="1100" dirty="0">
+                <a:latin typeface="Microsoft GothicNeo" panose="020B0500000101010101" pitchFamily="50" charset="-127"/>
+                <a:ea typeface="Microsoft GothicNeo" panose="020B0500000101010101" pitchFamily="50" charset="-127"/>
+                <a:cs typeface="Microsoft GothicNeo" panose="020B0500000101010101" pitchFamily="50" charset="-127"/>
+              </a:rPr>
+              <a:t>[ </a:t>
+            </a:r>
+            <a:r>
+              <a:rPr lang="ko-KR" altLang="en-US" sz="1100" dirty="0">
+                <a:latin typeface="Microsoft GothicNeo" panose="020B0500000101010101" pitchFamily="50" charset="-127"/>
+                <a:ea typeface="Microsoft GothicNeo" panose="020B0500000101010101" pitchFamily="50" charset="-127"/>
+                <a:cs typeface="Microsoft GothicNeo" panose="020B0500000101010101" pitchFamily="50" charset="-127"/>
+              </a:rPr>
+              <a:t>표</a:t>
+            </a:r>
+            <a:r>
+              <a:rPr lang="en-US" altLang="ko-KR" sz="1100" dirty="0">
+                <a:latin typeface="Microsoft GothicNeo" panose="020B0500000101010101" pitchFamily="50" charset="-127"/>
+                <a:ea typeface="Microsoft GothicNeo" panose="020B0500000101010101" pitchFamily="50" charset="-127"/>
+                <a:cs typeface="Microsoft GothicNeo" panose="020B0500000101010101" pitchFamily="50" charset="-127"/>
+              </a:rPr>
+              <a:t> 2.6 </a:t>
+            </a:r>
+            <a:r>
+              <a:rPr lang="ko-KR" altLang="en-US" sz="1100" dirty="0">
+                <a:latin typeface="Microsoft GothicNeo" panose="020B0500000101010101" pitchFamily="50" charset="-127"/>
+                <a:ea typeface="Microsoft GothicNeo" panose="020B0500000101010101" pitchFamily="50" charset="-127"/>
+                <a:cs typeface="Microsoft GothicNeo" panose="020B0500000101010101" pitchFamily="50" charset="-127"/>
+              </a:rPr>
+              <a:t>학습</a:t>
+            </a:r>
+            <a:r>
+              <a:rPr lang="en-US" altLang="ko-KR" sz="1100" dirty="0">
+                <a:latin typeface="Microsoft GothicNeo" panose="020B0500000101010101" pitchFamily="50" charset="-127"/>
+                <a:ea typeface="Microsoft GothicNeo" panose="020B0500000101010101" pitchFamily="50" charset="-127"/>
+                <a:cs typeface="Microsoft GothicNeo" panose="020B0500000101010101" pitchFamily="50" charset="-127"/>
+              </a:rPr>
+              <a:t>, </a:t>
+            </a:r>
+            <a:r>
+              <a:rPr lang="ko-KR" altLang="en-US" sz="1100" dirty="0">
+                <a:latin typeface="Microsoft GothicNeo" panose="020B0500000101010101" pitchFamily="50" charset="-127"/>
+                <a:ea typeface="Microsoft GothicNeo" panose="020B0500000101010101" pitchFamily="50" charset="-127"/>
+                <a:cs typeface="Microsoft GothicNeo" panose="020B0500000101010101" pitchFamily="50" charset="-127"/>
+              </a:rPr>
+              <a:t>테스트데이터 </a:t>
+            </a:r>
+            <a:r>
+              <a:rPr lang="en-US" altLang="ko-KR" sz="1100" dirty="0" err="1">
+                <a:latin typeface="Microsoft GothicNeo" panose="020B0500000101010101" pitchFamily="50" charset="-127"/>
+                <a:ea typeface="Microsoft GothicNeo" panose="020B0500000101010101" pitchFamily="50" charset="-127"/>
+                <a:cs typeface="Microsoft GothicNeo" panose="020B0500000101010101" pitchFamily="50" charset="-127"/>
+              </a:rPr>
+              <a:t>StandardScaler</a:t>
+            </a:r>
+            <a:r>
+              <a:rPr lang="en-US" altLang="ko-KR" sz="1100" dirty="0">
+                <a:latin typeface="Microsoft GothicNeo" panose="020B0500000101010101" pitchFamily="50" charset="-127"/>
+                <a:ea typeface="Microsoft GothicNeo" panose="020B0500000101010101" pitchFamily="50" charset="-127"/>
+                <a:cs typeface="Microsoft GothicNeo" panose="020B0500000101010101" pitchFamily="50" charset="-127"/>
+              </a:rPr>
+              <a:t> </a:t>
+            </a:r>
+            <a:r>
+              <a:rPr lang="ko-KR" altLang="en-US" sz="1100" dirty="0">
+                <a:latin typeface="Microsoft GothicNeo" panose="020B0500000101010101" pitchFamily="50" charset="-127"/>
+                <a:ea typeface="Microsoft GothicNeo" panose="020B0500000101010101" pitchFamily="50" charset="-127"/>
+                <a:cs typeface="Microsoft GothicNeo" panose="020B0500000101010101" pitchFamily="50" charset="-127"/>
+              </a:rPr>
+              <a:t>정규화 함수 </a:t>
+            </a:r>
+            <a:r>
+              <a:rPr lang="en-US" altLang="ko-KR" sz="1100" dirty="0">
+                <a:latin typeface="Microsoft GothicNeo" panose="020B0500000101010101" pitchFamily="50" charset="-127"/>
+                <a:ea typeface="Microsoft GothicNeo" panose="020B0500000101010101" pitchFamily="50" charset="-127"/>
+                <a:cs typeface="Microsoft GothicNeo" panose="020B0500000101010101" pitchFamily="50" charset="-127"/>
+              </a:rPr>
+              <a:t>]</a:t>
+            </a:r>
+            <a:endParaRPr lang="ko-KR" altLang="en-US" sz="1100" dirty="0">
+              <a:latin typeface="Microsoft GothicNeo" panose="020B0500000101010101" pitchFamily="50" charset="-127"/>
+              <a:ea typeface="Microsoft GothicNeo" panose="020B0500000101010101" pitchFamily="50" charset="-127"/>
+              <a:cs typeface="Microsoft GothicNeo" panose="020B0500000101010101" pitchFamily="50" charset="-127"/>
+            </a:endParaRPr>
+          </a:p>
+        </p:txBody>
+      </p:sp>
+      <p:graphicFrame>
+        <p:nvGraphicFramePr>
+          <p:cNvPr id="9" name="표 8">
+            <a:extLst>
+              <a:ext uri="{FF2B5EF4-FFF2-40B4-BE49-F238E27FC236}">
+                <a16:creationId xmlns:a16="http://schemas.microsoft.com/office/drawing/2014/main" id="{6E38F9DD-070D-DDE9-D39A-3DBC66466D99}"/>
+              </a:ext>
+            </a:extLst>
+          </p:cNvPr>
+          <p:cNvGraphicFramePr>
+            <a:graphicFrameLocks noGrp="1"/>
+          </p:cNvGraphicFramePr>
+          <p:nvPr>
+            <p:extLst>
+              <p:ext uri="{D42A27DB-BD31-4B8C-83A1-F6EECF244321}">
+                <p14:modId xmlns:p14="http://schemas.microsoft.com/office/powerpoint/2010/main" val="3230653927"/>
+              </p:ext>
+            </p:extLst>
+          </p:nvPr>
+        </p:nvGraphicFramePr>
+        <p:xfrm>
+          <a:off x="3689583" y="4754750"/>
+          <a:ext cx="4900942" cy="1301496"/>
+        </p:xfrm>
+        <a:graphic>
+          <a:graphicData uri="http://schemas.openxmlformats.org/drawingml/2006/table">
+            <a:tbl>
+              <a:tblPr firstRow="1" bandRow="1">
+                <a:tableStyleId>{5C22544A-7EE6-4342-B048-85BDC9FD1C3A}</a:tableStyleId>
+              </a:tblPr>
+              <a:tblGrid>
+                <a:gridCol w="4900942">
+                  <a:extLst>
+                    <a:ext uri="{9D8B030D-6E8A-4147-A177-3AD203B41FA5}">
+                      <a16:colId xmlns:a16="http://schemas.microsoft.com/office/drawing/2014/main" val="3138216807"/>
+                    </a:ext>
+                  </a:extLst>
+                </a:gridCol>
+              </a:tblGrid>
+              <a:tr h="1257017">
+                <a:tc>
+                  <a:txBody>
+                    <a:bodyPr/>
+                    <a:lstStyle/>
+                    <a:p>
+                      <a:pPr latinLnBrk="1">
+                        <a:lnSpc>
+                          <a:spcPct val="150000"/>
+                        </a:lnSpc>
+                      </a:pPr>
+                      <a:r>
+                        <a:rPr lang="en-US" altLang="ko-KR" sz="900" b="0" dirty="0">
+                          <a:solidFill>
+                            <a:schemeClr val="accent4"/>
+                          </a:solidFill>
+                          <a:latin typeface="Microsoft GothicNeo" panose="020B0500000101010101" pitchFamily="50" charset="-127"/>
+                          <a:ea typeface="Microsoft GothicNeo" panose="020B0500000101010101" pitchFamily="50" charset="-127"/>
+                          <a:cs typeface="Microsoft GothicNeo" panose="020B0500000101010101" pitchFamily="50" charset="-127"/>
+                        </a:rPr>
+                        <a:t>def </a:t>
+                      </a:r>
+                      <a:r>
+                        <a:rPr lang="en-US" altLang="ko-KR" sz="900" b="0" dirty="0" err="1">
+                          <a:solidFill>
+                            <a:schemeClr val="tx1"/>
+                          </a:solidFill>
+                          <a:latin typeface="Microsoft GothicNeo" panose="020B0500000101010101" pitchFamily="50" charset="-127"/>
+                          <a:ea typeface="Microsoft GothicNeo" panose="020B0500000101010101" pitchFamily="50" charset="-127"/>
+                          <a:cs typeface="Microsoft GothicNeo" panose="020B0500000101010101" pitchFamily="50" charset="-127"/>
+                        </a:rPr>
+                        <a:t>scale_data</a:t>
+                      </a:r>
+                      <a:r>
+                        <a:rPr lang="en-US" altLang="ko-KR" sz="900" b="0" dirty="0">
+                          <a:solidFill>
+                            <a:schemeClr val="tx1"/>
+                          </a:solidFill>
+                          <a:latin typeface="Microsoft GothicNeo" panose="020B0500000101010101" pitchFamily="50" charset="-127"/>
+                          <a:ea typeface="Microsoft GothicNeo" panose="020B0500000101010101" pitchFamily="50" charset="-127"/>
+                          <a:cs typeface="Microsoft GothicNeo" panose="020B0500000101010101" pitchFamily="50" charset="-127"/>
+                        </a:rPr>
+                        <a:t>(</a:t>
+                      </a:r>
+                      <a:r>
+                        <a:rPr lang="en-US" altLang="ko-KR" sz="900" b="0" dirty="0" err="1">
+                          <a:solidFill>
+                            <a:schemeClr val="tx1"/>
+                          </a:solidFill>
+                          <a:latin typeface="Microsoft GothicNeo" panose="020B0500000101010101" pitchFamily="50" charset="-127"/>
+                          <a:ea typeface="Microsoft GothicNeo" panose="020B0500000101010101" pitchFamily="50" charset="-127"/>
+                          <a:cs typeface="Microsoft GothicNeo" panose="020B0500000101010101" pitchFamily="50" charset="-127"/>
+                        </a:rPr>
+                        <a:t>X_train</a:t>
+                      </a:r>
+                      <a:r>
+                        <a:rPr lang="en-US" altLang="ko-KR" sz="900" b="0" dirty="0">
+                          <a:solidFill>
+                            <a:schemeClr val="tx1"/>
+                          </a:solidFill>
+                          <a:latin typeface="Microsoft GothicNeo" panose="020B0500000101010101" pitchFamily="50" charset="-127"/>
+                          <a:ea typeface="Microsoft GothicNeo" panose="020B0500000101010101" pitchFamily="50" charset="-127"/>
+                          <a:cs typeface="Microsoft GothicNeo" panose="020B0500000101010101" pitchFamily="50" charset="-127"/>
+                        </a:rPr>
+                        <a:t>, </a:t>
+                      </a:r>
+                      <a:r>
+                        <a:rPr lang="en-US" altLang="ko-KR" sz="900" b="0" dirty="0" err="1">
+                          <a:solidFill>
+                            <a:schemeClr val="tx1"/>
+                          </a:solidFill>
+                          <a:latin typeface="Microsoft GothicNeo" panose="020B0500000101010101" pitchFamily="50" charset="-127"/>
+                          <a:ea typeface="Microsoft GothicNeo" panose="020B0500000101010101" pitchFamily="50" charset="-127"/>
+                          <a:cs typeface="Microsoft GothicNeo" panose="020B0500000101010101" pitchFamily="50" charset="-127"/>
+                        </a:rPr>
+                        <a:t>X_test</a:t>
+                      </a:r>
+                      <a:r>
+                        <a:rPr lang="en-US" altLang="ko-KR" sz="900" b="0" dirty="0">
+                          <a:solidFill>
+                            <a:schemeClr val="tx1"/>
+                          </a:solidFill>
+                          <a:latin typeface="Microsoft GothicNeo" panose="020B0500000101010101" pitchFamily="50" charset="-127"/>
+                          <a:ea typeface="Microsoft GothicNeo" panose="020B0500000101010101" pitchFamily="50" charset="-127"/>
+                          <a:cs typeface="Microsoft GothicNeo" panose="020B0500000101010101" pitchFamily="50" charset="-127"/>
+                        </a:rPr>
+                        <a:t> :</a:t>
+                      </a:r>
+                    </a:p>
+                    <a:p>
+                      <a:pPr latinLnBrk="1">
+                        <a:lnSpc>
+                          <a:spcPct val="150000"/>
+                        </a:lnSpc>
+                      </a:pPr>
+                      <a:r>
+                        <a:rPr lang="en-US" altLang="ko-KR" sz="900" b="0" dirty="0">
+                          <a:solidFill>
+                            <a:schemeClr val="tx1"/>
+                          </a:solidFill>
+                          <a:latin typeface="Microsoft GothicNeo" panose="020B0500000101010101" pitchFamily="50" charset="-127"/>
+                          <a:ea typeface="Microsoft GothicNeo" panose="020B0500000101010101" pitchFamily="50" charset="-127"/>
+                          <a:cs typeface="Microsoft GothicNeo" panose="020B0500000101010101" pitchFamily="50" charset="-127"/>
+                        </a:rPr>
+                        <a:t>    scaler = </a:t>
+                      </a:r>
+                      <a:r>
+                        <a:rPr lang="en-US" altLang="ko-KR" sz="900" b="0" dirty="0" err="1">
+                          <a:solidFill>
+                            <a:schemeClr val="tx1"/>
+                          </a:solidFill>
+                          <a:latin typeface="Microsoft GothicNeo" panose="020B0500000101010101" pitchFamily="50" charset="-127"/>
+                          <a:ea typeface="Microsoft GothicNeo" panose="020B0500000101010101" pitchFamily="50" charset="-127"/>
+                          <a:cs typeface="Microsoft GothicNeo" panose="020B0500000101010101" pitchFamily="50" charset="-127"/>
+                        </a:rPr>
+                        <a:t>StandardScaler</a:t>
+                      </a:r>
+                      <a:r>
+                        <a:rPr lang="en-US" altLang="ko-KR" sz="900" b="0" dirty="0">
+                          <a:solidFill>
+                            <a:schemeClr val="tx1"/>
+                          </a:solidFill>
+                          <a:latin typeface="Microsoft GothicNeo" panose="020B0500000101010101" pitchFamily="50" charset="-127"/>
+                          <a:ea typeface="Microsoft GothicNeo" panose="020B0500000101010101" pitchFamily="50" charset="-127"/>
+                          <a:cs typeface="Microsoft GothicNeo" panose="020B0500000101010101" pitchFamily="50" charset="-127"/>
+                        </a:rPr>
+                        <a:t>()</a:t>
+                      </a:r>
+                    </a:p>
+                    <a:p>
+                      <a:pPr latinLnBrk="1">
+                        <a:lnSpc>
+                          <a:spcPct val="150000"/>
+                        </a:lnSpc>
+                      </a:pPr>
+                      <a:r>
+                        <a:rPr lang="en-US" altLang="ko-KR" sz="900" b="0" dirty="0">
+                          <a:solidFill>
+                            <a:schemeClr val="tx1"/>
+                          </a:solidFill>
+                          <a:latin typeface="Microsoft GothicNeo" panose="020B0500000101010101" pitchFamily="50" charset="-127"/>
+                          <a:ea typeface="Microsoft GothicNeo" panose="020B0500000101010101" pitchFamily="50" charset="-127"/>
+                          <a:cs typeface="Microsoft GothicNeo" panose="020B0500000101010101" pitchFamily="50" charset="-127"/>
+                        </a:rPr>
+                        <a:t>    </a:t>
+                      </a:r>
+                      <a:r>
+                        <a:rPr lang="en-US" altLang="ko-KR" sz="900" b="0" dirty="0" err="1">
+                          <a:solidFill>
+                            <a:schemeClr val="tx1"/>
+                          </a:solidFill>
+                          <a:latin typeface="Microsoft GothicNeo" panose="020B0500000101010101" pitchFamily="50" charset="-127"/>
+                          <a:ea typeface="Microsoft GothicNeo" panose="020B0500000101010101" pitchFamily="50" charset="-127"/>
+                          <a:cs typeface="Microsoft GothicNeo" panose="020B0500000101010101" pitchFamily="50" charset="-127"/>
+                        </a:rPr>
+                        <a:t>X_train_scaled</a:t>
+                      </a:r>
+                      <a:r>
+                        <a:rPr lang="en-US" altLang="ko-KR" sz="900" b="0" dirty="0">
+                          <a:solidFill>
+                            <a:schemeClr val="tx1"/>
+                          </a:solidFill>
+                          <a:latin typeface="Microsoft GothicNeo" panose="020B0500000101010101" pitchFamily="50" charset="-127"/>
+                          <a:ea typeface="Microsoft GothicNeo" panose="020B0500000101010101" pitchFamily="50" charset="-127"/>
+                          <a:cs typeface="Microsoft GothicNeo" panose="020B0500000101010101" pitchFamily="50" charset="-127"/>
+                        </a:rPr>
+                        <a:t> = </a:t>
+                      </a:r>
+                      <a:r>
+                        <a:rPr lang="en-US" altLang="ko-KR" sz="900" b="0" dirty="0" err="1">
+                          <a:solidFill>
+                            <a:schemeClr val="tx1"/>
+                          </a:solidFill>
+                          <a:latin typeface="Microsoft GothicNeo" panose="020B0500000101010101" pitchFamily="50" charset="-127"/>
+                          <a:ea typeface="Microsoft GothicNeo" panose="020B0500000101010101" pitchFamily="50" charset="-127"/>
+                          <a:cs typeface="Microsoft GothicNeo" panose="020B0500000101010101" pitchFamily="50" charset="-127"/>
+                        </a:rPr>
+                        <a:t>scaler.fit_transform</a:t>
+                      </a:r>
+                      <a:r>
+                        <a:rPr lang="en-US" altLang="ko-KR" sz="900" b="0" dirty="0">
+                          <a:solidFill>
+                            <a:schemeClr val="tx1"/>
+                          </a:solidFill>
+                          <a:latin typeface="Microsoft GothicNeo" panose="020B0500000101010101" pitchFamily="50" charset="-127"/>
+                          <a:ea typeface="Microsoft GothicNeo" panose="020B0500000101010101" pitchFamily="50" charset="-127"/>
+                          <a:cs typeface="Microsoft GothicNeo" panose="020B0500000101010101" pitchFamily="50" charset="-127"/>
+                        </a:rPr>
+                        <a:t>(</a:t>
+                      </a:r>
+                      <a:r>
+                        <a:rPr lang="en-US" altLang="ko-KR" sz="900" b="0" dirty="0" err="1">
+                          <a:solidFill>
+                            <a:schemeClr val="tx1"/>
+                          </a:solidFill>
+                          <a:latin typeface="Microsoft GothicNeo" panose="020B0500000101010101" pitchFamily="50" charset="-127"/>
+                          <a:ea typeface="Microsoft GothicNeo" panose="020B0500000101010101" pitchFamily="50" charset="-127"/>
+                          <a:cs typeface="Microsoft GothicNeo" panose="020B0500000101010101" pitchFamily="50" charset="-127"/>
+                        </a:rPr>
+                        <a:t>X_train</a:t>
+                      </a:r>
+                      <a:r>
+                        <a:rPr lang="en-US" altLang="ko-KR" sz="900" b="0" dirty="0">
+                          <a:solidFill>
+                            <a:schemeClr val="tx1"/>
+                          </a:solidFill>
+                          <a:latin typeface="Microsoft GothicNeo" panose="020B0500000101010101" pitchFamily="50" charset="-127"/>
+                          <a:ea typeface="Microsoft GothicNeo" panose="020B0500000101010101" pitchFamily="50" charset="-127"/>
+                          <a:cs typeface="Microsoft GothicNeo" panose="020B0500000101010101" pitchFamily="50" charset="-127"/>
+                        </a:rPr>
+                        <a:t>)</a:t>
+                      </a:r>
+                    </a:p>
+                    <a:p>
+                      <a:pPr latinLnBrk="1">
+                        <a:lnSpc>
+                          <a:spcPct val="150000"/>
+                        </a:lnSpc>
+                      </a:pPr>
+                      <a:r>
+                        <a:rPr lang="en-US" altLang="ko-KR" sz="900" b="0" dirty="0">
+                          <a:solidFill>
+                            <a:schemeClr val="tx1"/>
+                          </a:solidFill>
+                          <a:latin typeface="Microsoft GothicNeo" panose="020B0500000101010101" pitchFamily="50" charset="-127"/>
+                          <a:ea typeface="Microsoft GothicNeo" panose="020B0500000101010101" pitchFamily="50" charset="-127"/>
+                          <a:cs typeface="Microsoft GothicNeo" panose="020B0500000101010101" pitchFamily="50" charset="-127"/>
+                        </a:rPr>
+                        <a:t>    </a:t>
+                      </a:r>
+                      <a:r>
+                        <a:rPr lang="en-US" altLang="ko-KR" sz="900" b="0" dirty="0" err="1">
+                          <a:solidFill>
+                            <a:schemeClr val="tx1"/>
+                          </a:solidFill>
+                          <a:latin typeface="Microsoft GothicNeo" panose="020B0500000101010101" pitchFamily="50" charset="-127"/>
+                          <a:ea typeface="Microsoft GothicNeo" panose="020B0500000101010101" pitchFamily="50" charset="-127"/>
+                          <a:cs typeface="Microsoft GothicNeo" panose="020B0500000101010101" pitchFamily="50" charset="-127"/>
+                        </a:rPr>
+                        <a:t>X_test_scaled</a:t>
+                      </a:r>
+                      <a:r>
+                        <a:rPr lang="en-US" altLang="ko-KR" sz="900" b="0" dirty="0">
+                          <a:solidFill>
+                            <a:schemeClr val="tx1"/>
+                          </a:solidFill>
+                          <a:latin typeface="Microsoft GothicNeo" panose="020B0500000101010101" pitchFamily="50" charset="-127"/>
+                          <a:ea typeface="Microsoft GothicNeo" panose="020B0500000101010101" pitchFamily="50" charset="-127"/>
+                          <a:cs typeface="Microsoft GothicNeo" panose="020B0500000101010101" pitchFamily="50" charset="-127"/>
+                        </a:rPr>
+                        <a:t> = </a:t>
+                      </a:r>
+                      <a:r>
+                        <a:rPr lang="en-US" altLang="ko-KR" sz="900" b="0" dirty="0" err="1">
+                          <a:solidFill>
+                            <a:schemeClr val="tx1"/>
+                          </a:solidFill>
+                          <a:latin typeface="Microsoft GothicNeo" panose="020B0500000101010101" pitchFamily="50" charset="-127"/>
+                          <a:ea typeface="Microsoft GothicNeo" panose="020B0500000101010101" pitchFamily="50" charset="-127"/>
+                          <a:cs typeface="Microsoft GothicNeo" panose="020B0500000101010101" pitchFamily="50" charset="-127"/>
+                        </a:rPr>
+                        <a:t>scaler.transform</a:t>
+                      </a:r>
+                      <a:r>
+                        <a:rPr lang="en-US" altLang="ko-KR" sz="900" b="0" dirty="0">
+                          <a:solidFill>
+                            <a:schemeClr val="tx1"/>
+                          </a:solidFill>
+                          <a:latin typeface="Microsoft GothicNeo" panose="020B0500000101010101" pitchFamily="50" charset="-127"/>
+                          <a:ea typeface="Microsoft GothicNeo" panose="020B0500000101010101" pitchFamily="50" charset="-127"/>
+                          <a:cs typeface="Microsoft GothicNeo" panose="020B0500000101010101" pitchFamily="50" charset="-127"/>
+                        </a:rPr>
+                        <a:t>(</a:t>
+                      </a:r>
+                      <a:r>
+                        <a:rPr lang="en-US" altLang="ko-KR" sz="900" b="0" dirty="0" err="1">
+                          <a:solidFill>
+                            <a:schemeClr val="tx1"/>
+                          </a:solidFill>
+                          <a:latin typeface="Microsoft GothicNeo" panose="020B0500000101010101" pitchFamily="50" charset="-127"/>
+                          <a:ea typeface="Microsoft GothicNeo" panose="020B0500000101010101" pitchFamily="50" charset="-127"/>
+                          <a:cs typeface="Microsoft GothicNeo" panose="020B0500000101010101" pitchFamily="50" charset="-127"/>
+                        </a:rPr>
+                        <a:t>X_test</a:t>
+                      </a:r>
+                      <a:r>
+                        <a:rPr lang="en-US" altLang="ko-KR" sz="900" b="0" dirty="0">
+                          <a:solidFill>
+                            <a:schemeClr val="tx1"/>
+                          </a:solidFill>
+                          <a:latin typeface="Microsoft GothicNeo" panose="020B0500000101010101" pitchFamily="50" charset="-127"/>
+                          <a:ea typeface="Microsoft GothicNeo" panose="020B0500000101010101" pitchFamily="50" charset="-127"/>
+                          <a:cs typeface="Microsoft GothicNeo" panose="020B0500000101010101" pitchFamily="50" charset="-127"/>
+                        </a:rPr>
+                        <a:t>)</a:t>
+                      </a:r>
+                    </a:p>
+                    <a:p>
+                      <a:pPr latinLnBrk="1">
+                        <a:lnSpc>
+                          <a:spcPct val="150000"/>
+                        </a:lnSpc>
+                      </a:pPr>
+                      <a:endParaRPr lang="en-US" altLang="ko-KR" sz="900" b="0" dirty="0">
+                        <a:solidFill>
+                          <a:schemeClr val="tx1"/>
+                        </a:solidFill>
+                        <a:latin typeface="Microsoft GothicNeo" panose="020B0500000101010101" pitchFamily="50" charset="-127"/>
+                        <a:ea typeface="Microsoft GothicNeo" panose="020B0500000101010101" pitchFamily="50" charset="-127"/>
+                        <a:cs typeface="Microsoft GothicNeo" panose="020B0500000101010101" pitchFamily="50" charset="-127"/>
+                      </a:endParaRPr>
+                    </a:p>
+                    <a:p>
+                      <a:pPr latinLnBrk="1">
+                        <a:lnSpc>
+                          <a:spcPct val="150000"/>
+                        </a:lnSpc>
+                      </a:pPr>
+                      <a:r>
+                        <a:rPr lang="en-US" altLang="ko-KR" sz="900" b="0" dirty="0">
+                          <a:solidFill>
+                            <a:schemeClr val="tx1"/>
+                          </a:solidFill>
+                          <a:latin typeface="Microsoft GothicNeo" panose="020B0500000101010101" pitchFamily="50" charset="-127"/>
+                          <a:ea typeface="Microsoft GothicNeo" panose="020B0500000101010101" pitchFamily="50" charset="-127"/>
+                          <a:cs typeface="Microsoft GothicNeo" panose="020B0500000101010101" pitchFamily="50" charset="-127"/>
+                        </a:rPr>
+                        <a:t>    </a:t>
+                      </a:r>
+                      <a:r>
+                        <a:rPr lang="en-US" altLang="ko-KR" sz="900" b="0" dirty="0">
+                          <a:solidFill>
+                            <a:schemeClr val="accent4"/>
+                          </a:solidFill>
+                          <a:latin typeface="Microsoft GothicNeo" panose="020B0500000101010101" pitchFamily="50" charset="-127"/>
+                          <a:ea typeface="Microsoft GothicNeo" panose="020B0500000101010101" pitchFamily="50" charset="-127"/>
+                          <a:cs typeface="Microsoft GothicNeo" panose="020B0500000101010101" pitchFamily="50" charset="-127"/>
+                        </a:rPr>
+                        <a:t>return</a:t>
+                      </a:r>
+                      <a:r>
+                        <a:rPr lang="en-US" altLang="ko-KR" sz="900" b="0" dirty="0">
+                          <a:solidFill>
+                            <a:schemeClr val="tx1"/>
+                          </a:solidFill>
+                          <a:latin typeface="Microsoft GothicNeo" panose="020B0500000101010101" pitchFamily="50" charset="-127"/>
+                          <a:ea typeface="Microsoft GothicNeo" panose="020B0500000101010101" pitchFamily="50" charset="-127"/>
+                          <a:cs typeface="Microsoft GothicNeo" panose="020B0500000101010101" pitchFamily="50" charset="-127"/>
+                        </a:rPr>
+                        <a:t> </a:t>
+                      </a:r>
+                      <a:r>
+                        <a:rPr lang="en-US" altLang="ko-KR" sz="900" b="0" dirty="0" err="1">
+                          <a:solidFill>
+                            <a:schemeClr val="tx1"/>
+                          </a:solidFill>
+                          <a:latin typeface="Microsoft GothicNeo" panose="020B0500000101010101" pitchFamily="50" charset="-127"/>
+                          <a:ea typeface="Microsoft GothicNeo" panose="020B0500000101010101" pitchFamily="50" charset="-127"/>
+                          <a:cs typeface="Microsoft GothicNeo" panose="020B0500000101010101" pitchFamily="50" charset="-127"/>
+                        </a:rPr>
+                        <a:t>X_train_scaled</a:t>
+                      </a:r>
+                      <a:r>
+                        <a:rPr lang="en-US" altLang="ko-KR" sz="900" b="0" dirty="0">
+                          <a:solidFill>
+                            <a:schemeClr val="tx1"/>
+                          </a:solidFill>
+                          <a:latin typeface="Microsoft GothicNeo" panose="020B0500000101010101" pitchFamily="50" charset="-127"/>
+                          <a:ea typeface="Microsoft GothicNeo" panose="020B0500000101010101" pitchFamily="50" charset="-127"/>
+                          <a:cs typeface="Microsoft GothicNeo" panose="020B0500000101010101" pitchFamily="50" charset="-127"/>
+                        </a:rPr>
+                        <a:t>, </a:t>
+                      </a:r>
+                      <a:r>
+                        <a:rPr lang="en-US" altLang="ko-KR" sz="900" b="0" dirty="0" err="1">
+                          <a:solidFill>
+                            <a:schemeClr val="tx1"/>
+                          </a:solidFill>
+                          <a:latin typeface="Microsoft GothicNeo" panose="020B0500000101010101" pitchFamily="50" charset="-127"/>
+                          <a:ea typeface="Microsoft GothicNeo" panose="020B0500000101010101" pitchFamily="50" charset="-127"/>
+                          <a:cs typeface="Microsoft GothicNeo" panose="020B0500000101010101" pitchFamily="50" charset="-127"/>
+                        </a:rPr>
+                        <a:t>X_test_scaled</a:t>
+                      </a:r>
+                      <a:r>
+                        <a:rPr lang="en-US" altLang="ko-KR" sz="900" b="0" dirty="0">
+                          <a:solidFill>
+                            <a:schemeClr val="tx1"/>
+                          </a:solidFill>
+                          <a:latin typeface="Microsoft GothicNeo" panose="020B0500000101010101" pitchFamily="50" charset="-127"/>
+                          <a:ea typeface="Microsoft GothicNeo" panose="020B0500000101010101" pitchFamily="50" charset="-127"/>
+                          <a:cs typeface="Microsoft GothicNeo" panose="020B0500000101010101" pitchFamily="50" charset="-127"/>
+                        </a:rPr>
+                        <a:t>, scaler</a:t>
+                      </a:r>
+                    </a:p>
+                  </a:txBody>
+                  <a:tcPr>
+                    <a:lnL w="28575" cap="flat" cmpd="sng" algn="ctr">
+                      <a:solidFill>
+                        <a:schemeClr val="accent4"/>
+                      </a:solidFill>
+                      <a:prstDash val="solid"/>
+                      <a:round/>
+                      <a:headEnd type="none" w="med" len="med"/>
+                      <a:tailEnd type="none" w="med" len="med"/>
+                    </a:lnL>
+                    <a:solidFill>
+                      <a:schemeClr val="bg2"/>
+                    </a:solidFill>
+                  </a:tcPr>
+                </a:tc>
+                <a:extLst>
+                  <a:ext uri="{0D108BD9-81ED-4DB2-BD59-A6C34878D82A}">
+                    <a16:rowId xmlns:a16="http://schemas.microsoft.com/office/drawing/2014/main" val="3261029982"/>
+                  </a:ext>
+                </a:extLst>
+              </a:tr>
+            </a:tbl>
+          </a:graphicData>
+        </a:graphic>
+      </p:graphicFrame>
+    </p:spTree>
+    <p:extLst>
+      <p:ext uri="{BB962C8B-B14F-4D97-AF65-F5344CB8AC3E}">
+        <p14:creationId xmlns:p14="http://schemas.microsoft.com/office/powerpoint/2010/main" val="1393844913"/>
+      </p:ext>
+    </p:extLst>
+  </p:cSld>
+  <p:clrMapOvr>
+    <a:masterClrMapping/>
+  </p:clrMapOvr>
+</p:sld>
+</file>
+
+<file path=ppt/slides/slide16.xml><?xml version="1.0" encoding="utf-8"?>
+<p:sld xmlns:a="http://schemas.openxmlformats.org/drawingml/2006/main" xmlns:r="http://schemas.openxmlformats.org/officeDocument/2006/relationships" xmlns:p="http://schemas.openxmlformats.org/presentationml/2006/main">
+  <p:cSld>
+    <p:spTree>
+      <p:nvGrpSpPr>
+        <p:cNvPr id="1" name="">
+          <a:extLst>
+            <a:ext uri="{FF2B5EF4-FFF2-40B4-BE49-F238E27FC236}">
+              <a16:creationId xmlns:a16="http://schemas.microsoft.com/office/drawing/2014/main" id="{D36C35EA-6DE8-3019-55D1-8BFDCD82138E}"/>
+            </a:ext>
+          </a:extLst>
+        </p:cNvPr>
+        <p:cNvGrpSpPr/>
+        <p:nvPr/>
+      </p:nvGrpSpPr>
+      <p:grpSpPr>
+        <a:xfrm>
+          <a:off x="0" y="0"/>
+          <a:ext cx="0" cy="0"/>
+          <a:chOff x="0" y="0"/>
+          <a:chExt cx="0" cy="0"/>
+        </a:xfrm>
+      </p:grpSpPr>
+      <p:sp>
+        <p:nvSpPr>
+          <p:cNvPr id="8" name="직사각형 7">
+            <a:extLst>
+              <a:ext uri="{FF2B5EF4-FFF2-40B4-BE49-F238E27FC236}">
+                <a16:creationId xmlns:a16="http://schemas.microsoft.com/office/drawing/2014/main" id="{A5E975E4-D1B7-E691-6D9E-E2C175A90186}"/>
+              </a:ext>
+            </a:extLst>
+          </p:cNvPr>
+          <p:cNvSpPr/>
+          <p:nvPr/>
+        </p:nvSpPr>
+        <p:spPr>
+          <a:xfrm>
+            <a:off x="-169334" y="-105030"/>
+            <a:ext cx="12848166" cy="761198"/>
+          </a:xfrm>
+          <a:prstGeom prst="rect">
+            <a:avLst/>
+          </a:prstGeom>
+          <a:solidFill>
+            <a:schemeClr val="bg1">
+              <a:lumMod val="95000"/>
+            </a:schemeClr>
+          </a:solidFill>
+          <a:ln>
+            <a:noFill/>
+          </a:ln>
+        </p:spPr>
+        <p:style>
+          <a:lnRef idx="2">
+            <a:schemeClr val="accent1">
+              <a:shade val="15000"/>
+            </a:schemeClr>
+          </a:lnRef>
+          <a:fillRef idx="1">
+            <a:schemeClr val="accent1"/>
+          </a:fillRef>
+          <a:effectRef idx="0">
+            <a:schemeClr val="accent1"/>
+          </a:effectRef>
+          <a:fontRef idx="minor">
+            <a:schemeClr val="lt1"/>
+          </a:fontRef>
+        </p:style>
+        <p:txBody>
+          <a:bodyPr rtlCol="0" anchor="ctr"/>
+          <a:lstStyle/>
+          <a:p>
+            <a:pPr algn="ctr"/>
+            <a:endParaRPr lang="ko-KR" altLang="en-US"/>
+          </a:p>
+        </p:txBody>
+      </p:sp>
+      <p:sp>
+        <p:nvSpPr>
+          <p:cNvPr id="7" name="TextBox 6">
+            <a:extLst>
+              <a:ext uri="{FF2B5EF4-FFF2-40B4-BE49-F238E27FC236}">
+                <a16:creationId xmlns:a16="http://schemas.microsoft.com/office/drawing/2014/main" id="{C514FCF5-4407-0692-8644-380FDF0D4CD1}"/>
+              </a:ext>
+            </a:extLst>
+          </p:cNvPr>
+          <p:cNvSpPr txBox="1"/>
+          <p:nvPr/>
+        </p:nvSpPr>
+        <p:spPr>
+          <a:xfrm>
+            <a:off x="-2" y="179916"/>
+            <a:ext cx="7217832" cy="477054"/>
+          </a:xfrm>
+          <a:prstGeom prst="rect">
+            <a:avLst/>
+          </a:prstGeom>
+          <a:noFill/>
+          <a:ln>
+            <a:noFill/>
+          </a:ln>
+        </p:spPr>
+        <p:txBody>
+          <a:bodyPr rot="0" spcFirstLastPara="0" vertOverflow="overflow" horzOverflow="overflow" vert="horz" wrap="square" lIns="91440" tIns="45720" rIns="91440" bIns="45720" numCol="1" spcCol="0" rtlCol="0" fromWordArt="0" anchor="t" anchorCtr="0" forceAA="0" compatLnSpc="1">
+            <a:prstTxWarp prst="textNoShape">
+              <a:avLst/>
+            </a:prstTxWarp>
+            <a:spAutoFit/>
+          </a:bodyPr>
+          <a:lstStyle/>
+          <a:p>
+            <a:r>
+              <a:rPr lang="ko-KR" altLang="en-US" sz="2500" dirty="0">
+                <a:solidFill>
+                  <a:srgbClr val="747474"/>
+                </a:solidFill>
+                <a:latin typeface="Microsoft GothicNeo"/>
+                <a:ea typeface="Microsoft GothicNeo"/>
+                <a:cs typeface="Arial"/>
+              </a:rPr>
+              <a:t>02-</a:t>
+            </a:r>
+            <a:r>
+              <a:rPr lang="en-US" altLang="ko-KR" sz="2500" dirty="0">
+                <a:solidFill>
+                  <a:srgbClr val="747474"/>
+                </a:solidFill>
+                <a:latin typeface="Microsoft GothicNeo"/>
+                <a:ea typeface="Microsoft GothicNeo"/>
+                <a:cs typeface="Arial"/>
+              </a:rPr>
+              <a:t>7</a:t>
+            </a:r>
+            <a:r>
+              <a:rPr lang="ko-KR" altLang="en-US" sz="2500" dirty="0">
+                <a:solidFill>
+                  <a:srgbClr val="747474"/>
+                </a:solidFill>
+                <a:latin typeface="Microsoft GothicNeo"/>
+                <a:ea typeface="Microsoft GothicNeo"/>
+                <a:cs typeface="Arial"/>
+              </a:rPr>
+              <a:t> 모델링</a:t>
+            </a:r>
+            <a:r>
+              <a:rPr lang="en-US" altLang="ko-KR" sz="2500" dirty="0">
+                <a:solidFill>
+                  <a:srgbClr val="747474"/>
+                </a:solidFill>
+                <a:latin typeface="Microsoft GothicNeo"/>
+                <a:ea typeface="Microsoft GothicNeo"/>
+                <a:cs typeface="Arial"/>
+              </a:rPr>
+              <a:t>(1)</a:t>
+            </a:r>
+            <a:endParaRPr lang="ko-KR" altLang="en-US" sz="2500" dirty="0">
+              <a:solidFill>
+                <a:srgbClr val="747474"/>
+              </a:solidFill>
+              <a:latin typeface="Microsoft GothicNeo"/>
+              <a:ea typeface="Microsoft GothicNeo"/>
+              <a:cs typeface="Arial"/>
+            </a:endParaRPr>
+          </a:p>
+        </p:txBody>
+      </p:sp>
+      <p:sp>
+        <p:nvSpPr>
+          <p:cNvPr id="2" name="TextBox 1">
+            <a:extLst>
+              <a:ext uri="{FF2B5EF4-FFF2-40B4-BE49-F238E27FC236}">
+                <a16:creationId xmlns:a16="http://schemas.microsoft.com/office/drawing/2014/main" id="{9322B2B2-D577-BB99-799E-BAC7D3F5A7A1}"/>
+              </a:ext>
+            </a:extLst>
+          </p:cNvPr>
+          <p:cNvSpPr txBox="1"/>
+          <p:nvPr/>
+        </p:nvSpPr>
+        <p:spPr>
+          <a:xfrm>
+            <a:off x="613832" y="941917"/>
+            <a:ext cx="10816167" cy="1906163"/>
+          </a:xfrm>
+          <a:prstGeom prst="rect">
+            <a:avLst/>
+          </a:prstGeom>
+          <a:noFill/>
+        </p:spPr>
+        <p:txBody>
+          <a:bodyPr rot="0" spcFirstLastPara="0" vertOverflow="overflow" horzOverflow="overflow" vert="horz" wrap="square" lIns="91440" tIns="45720" rIns="91440" bIns="45720" numCol="1" spcCol="0" rtlCol="0" fromWordArt="0" anchor="t" anchorCtr="0" forceAA="0" compatLnSpc="1">
+            <a:prstTxWarp prst="textNoShape">
+              <a:avLst/>
+            </a:prstTxWarp>
+            <a:spAutoFit/>
+          </a:bodyPr>
+          <a:lstStyle/>
+          <a:p>
+            <a:pPr marL="285750" indent="-285750">
+              <a:lnSpc>
+                <a:spcPct val="150000"/>
+              </a:lnSpc>
+              <a:buFont typeface="Wingdings"/>
+              <a:buChar char="q"/>
+            </a:pPr>
+            <a:r>
+              <a:rPr lang="en-US" altLang="ko-KR" dirty="0">
+                <a:latin typeface="Microsoft GothicNeo"/>
+                <a:ea typeface="Microsoft GothicNeo"/>
+                <a:cs typeface="Microsoft GothicNeo"/>
+              </a:rPr>
+              <a:t> 8:2 </a:t>
+            </a:r>
+            <a:r>
+              <a:rPr lang="ko-KR" altLang="en-US" dirty="0">
+                <a:latin typeface="Microsoft GothicNeo"/>
+                <a:ea typeface="Microsoft GothicNeo"/>
+                <a:cs typeface="Microsoft GothicNeo"/>
+              </a:rPr>
+              <a:t>학습</a:t>
+            </a:r>
+            <a:r>
+              <a:rPr lang="en-US" altLang="ko-KR" dirty="0">
+                <a:latin typeface="Microsoft GothicNeo"/>
+                <a:ea typeface="Microsoft GothicNeo"/>
+                <a:cs typeface="Microsoft GothicNeo"/>
+              </a:rPr>
+              <a:t>/</a:t>
+            </a:r>
+            <a:r>
+              <a:rPr lang="ko-KR" altLang="en-US" dirty="0">
+                <a:latin typeface="Microsoft GothicNeo"/>
+                <a:ea typeface="Microsoft GothicNeo"/>
+                <a:cs typeface="Microsoft GothicNeo"/>
+              </a:rPr>
+              <a:t>검증 데이터 분할</a:t>
+            </a:r>
+          </a:p>
+          <a:p>
+            <a:pPr marL="400050" lvl="2" indent="228600">
+              <a:lnSpc>
+                <a:spcPct val="150000"/>
+              </a:lnSpc>
+              <a:buFont typeface="Wingdings,Sans-Serif"/>
+              <a:buChar char="§"/>
+            </a:pPr>
+            <a:r>
+              <a:rPr lang="en-US" altLang="ko-KR" sz="1300" dirty="0">
+                <a:latin typeface="Microsoft GothicNeo"/>
+                <a:ea typeface="Microsoft GothicNeo"/>
+                <a:cs typeface="Microsoft GothicNeo"/>
+              </a:rPr>
+              <a:t>80% </a:t>
+            </a:r>
+            <a:r>
+              <a:rPr lang="ko-KR" altLang="en-US" sz="1300" dirty="0">
+                <a:latin typeface="Microsoft GothicNeo"/>
+                <a:ea typeface="Microsoft GothicNeo"/>
+                <a:cs typeface="Microsoft GothicNeo"/>
+              </a:rPr>
+              <a:t>학습용 </a:t>
+            </a:r>
+            <a:r>
+              <a:rPr lang="en-US" altLang="ko-KR" sz="1300" dirty="0">
+                <a:latin typeface="Microsoft GothicNeo"/>
+                <a:ea typeface="Microsoft GothicNeo"/>
+                <a:cs typeface="Microsoft GothicNeo"/>
+              </a:rPr>
+              <a:t>Train </a:t>
+            </a:r>
+            <a:r>
+              <a:rPr lang="ko-KR" altLang="en-US" sz="1300" dirty="0">
+                <a:latin typeface="Microsoft GothicNeo"/>
+                <a:ea typeface="Microsoft GothicNeo"/>
+                <a:cs typeface="Microsoft GothicNeo"/>
+              </a:rPr>
+              <a:t>데이터로 사용</a:t>
+            </a:r>
+            <a:r>
+              <a:rPr lang="en-US" altLang="ko-KR" sz="1300" dirty="0">
+                <a:latin typeface="Microsoft GothicNeo"/>
+                <a:ea typeface="Microsoft GothicNeo"/>
+                <a:cs typeface="Microsoft GothicNeo"/>
+              </a:rPr>
+              <a:t>, </a:t>
+            </a:r>
+            <a:r>
+              <a:rPr lang="ko-KR" altLang="en-US" sz="1300" dirty="0">
+                <a:latin typeface="Microsoft GothicNeo"/>
+                <a:ea typeface="Microsoft GothicNeo"/>
+                <a:cs typeface="Microsoft GothicNeo"/>
+              </a:rPr>
+              <a:t>나머지 </a:t>
+            </a:r>
+            <a:r>
+              <a:rPr lang="en-US" altLang="ko-KR" sz="1300" dirty="0">
+                <a:latin typeface="Microsoft GothicNeo"/>
+                <a:ea typeface="Microsoft GothicNeo"/>
+                <a:cs typeface="Microsoft GothicNeo"/>
+              </a:rPr>
+              <a:t>20%</a:t>
+            </a:r>
+            <a:r>
+              <a:rPr lang="ko-KR" altLang="en-US" sz="1300" dirty="0">
+                <a:latin typeface="Microsoft GothicNeo"/>
+                <a:ea typeface="Microsoft GothicNeo"/>
+                <a:cs typeface="Microsoft GothicNeo"/>
+              </a:rPr>
+              <a:t>는 검증용</a:t>
+            </a:r>
+            <a:r>
+              <a:rPr lang="en-US" altLang="ko-KR" sz="1300" dirty="0">
+                <a:latin typeface="Microsoft GothicNeo"/>
+                <a:ea typeface="Microsoft GothicNeo"/>
+                <a:cs typeface="Microsoft GothicNeo"/>
+              </a:rPr>
+              <a:t> Validation </a:t>
+            </a:r>
+            <a:r>
+              <a:rPr lang="ko-KR" altLang="en-US" sz="1300" dirty="0">
+                <a:latin typeface="Microsoft GothicNeo"/>
+                <a:ea typeface="Microsoft GothicNeo"/>
+                <a:cs typeface="Microsoft GothicNeo"/>
+              </a:rPr>
+              <a:t>으로 사용</a:t>
+            </a:r>
+            <a:endParaRPr lang="en-US" altLang="ko-KR" sz="1300" dirty="0">
+              <a:latin typeface="Microsoft GothicNeo"/>
+              <a:ea typeface="Microsoft GothicNeo"/>
+              <a:cs typeface="Microsoft GothicNeo"/>
+            </a:endParaRPr>
+          </a:p>
+          <a:p>
+            <a:pPr marL="400050" lvl="2" indent="228600">
+              <a:lnSpc>
+                <a:spcPct val="150000"/>
+              </a:lnSpc>
+              <a:buFont typeface="Wingdings,Sans-Serif"/>
+              <a:buChar char="§"/>
+            </a:pPr>
+            <a:r>
+              <a:rPr lang="en-US" altLang="ko-KR" sz="1300" dirty="0">
+                <a:latin typeface="Microsoft GothicNeo"/>
+                <a:ea typeface="Microsoft GothicNeo"/>
+                <a:cs typeface="Microsoft GothicNeo"/>
+              </a:rPr>
+              <a:t>Cross-Validation </a:t>
+            </a:r>
+            <a:r>
+              <a:rPr lang="ko-KR" altLang="en-US" sz="1300" dirty="0">
+                <a:latin typeface="Microsoft GothicNeo"/>
+                <a:ea typeface="Microsoft GothicNeo"/>
+                <a:cs typeface="Microsoft GothicNeo"/>
+              </a:rPr>
+              <a:t>전략 사용</a:t>
+            </a:r>
+            <a:endParaRPr lang="en-US" altLang="ko-KR" sz="1300" dirty="0">
+              <a:latin typeface="Microsoft GothicNeo"/>
+              <a:ea typeface="Microsoft GothicNeo"/>
+              <a:cs typeface="Microsoft GothicNeo"/>
+            </a:endParaRPr>
+          </a:p>
+          <a:p>
+            <a:pPr marL="800100" lvl="3" indent="-228600">
+              <a:lnSpc>
+                <a:spcPct val="150000"/>
+              </a:lnSpc>
+              <a:buFont typeface="Calibri"/>
+              <a:buChar char="-"/>
+            </a:pPr>
+            <a:r>
+              <a:rPr lang="en-US" altLang="ko-KR" sz="1200" dirty="0">
+                <a:latin typeface="Microsoft GothicNeo"/>
+                <a:ea typeface="Microsoft GothicNeo"/>
+                <a:cs typeface="Microsoft GothicNeo"/>
+              </a:rPr>
+              <a:t>20% </a:t>
+            </a:r>
+            <a:r>
+              <a:rPr lang="ko-KR" altLang="en-US" sz="1200" dirty="0">
+                <a:latin typeface="Microsoft GothicNeo"/>
+                <a:ea typeface="Microsoft GothicNeo"/>
+                <a:cs typeface="Microsoft GothicNeo"/>
+              </a:rPr>
+              <a:t>검증용 데이터들은 검증용으로 사용 → 모델 선택 및 </a:t>
+            </a:r>
+            <a:r>
+              <a:rPr lang="ko-KR" altLang="en-US" sz="1200" dirty="0" err="1">
+                <a:latin typeface="Microsoft GothicNeo"/>
+                <a:ea typeface="Microsoft GothicNeo"/>
+                <a:cs typeface="Microsoft GothicNeo"/>
+              </a:rPr>
+              <a:t>하이퍼파라미터</a:t>
+            </a:r>
+            <a:r>
+              <a:rPr lang="ko-KR" altLang="en-US" sz="1200" dirty="0">
+                <a:latin typeface="Microsoft GothicNeo"/>
+                <a:ea typeface="Microsoft GothicNeo"/>
+                <a:cs typeface="Microsoft GothicNeo"/>
+              </a:rPr>
+              <a:t> 튜닝 활용</a:t>
+            </a:r>
+            <a:endParaRPr lang="en-US" altLang="ko-KR" sz="1200" dirty="0">
+              <a:latin typeface="Microsoft GothicNeo"/>
+              <a:ea typeface="Microsoft GothicNeo"/>
+              <a:cs typeface="Microsoft GothicNeo"/>
+            </a:endParaRPr>
+          </a:p>
+          <a:p>
+            <a:pPr marL="800100" lvl="3" indent="-228600">
+              <a:lnSpc>
+                <a:spcPct val="150000"/>
+              </a:lnSpc>
+              <a:buFont typeface="Calibri"/>
+              <a:buChar char="-"/>
+            </a:pPr>
+            <a:r>
+              <a:rPr lang="en-US" altLang="ko-KR" sz="1200" dirty="0">
+                <a:solidFill>
+                  <a:srgbClr val="C00000"/>
+                </a:solidFill>
+                <a:latin typeface="Microsoft GothicNeo"/>
+                <a:ea typeface="Microsoft GothicNeo"/>
+                <a:cs typeface="Microsoft GothicNeo"/>
+              </a:rPr>
+              <a:t>Stratified </a:t>
+            </a:r>
+            <a:r>
+              <a:rPr lang="en-US" altLang="ko-KR" sz="1200" dirty="0" err="1">
+                <a:solidFill>
+                  <a:srgbClr val="C00000"/>
+                </a:solidFill>
+                <a:latin typeface="Microsoft GothicNeo"/>
+                <a:ea typeface="Microsoft GothicNeo"/>
+                <a:cs typeface="Microsoft GothicNeo"/>
+              </a:rPr>
+              <a:t>Kfold</a:t>
+            </a:r>
+            <a:r>
+              <a:rPr lang="en-US" altLang="ko-KR" sz="1200" dirty="0">
+                <a:solidFill>
+                  <a:srgbClr val="C00000"/>
+                </a:solidFill>
+                <a:latin typeface="Microsoft GothicNeo"/>
+                <a:ea typeface="Microsoft GothicNeo"/>
+                <a:cs typeface="Microsoft GothicNeo"/>
+              </a:rPr>
+              <a:t> </a:t>
+            </a:r>
+            <a:r>
+              <a:rPr lang="ko-KR" altLang="en-US" sz="1200" dirty="0">
+                <a:solidFill>
+                  <a:srgbClr val="C00000"/>
+                </a:solidFill>
+                <a:latin typeface="Microsoft GothicNeo"/>
+                <a:ea typeface="Microsoft GothicNeo"/>
+                <a:cs typeface="Microsoft GothicNeo"/>
+              </a:rPr>
+              <a:t>기반 교차검증 </a:t>
+            </a:r>
+            <a:r>
+              <a:rPr lang="ko-KR" altLang="en-US" sz="1200" dirty="0">
+                <a:latin typeface="Microsoft GothicNeo"/>
+                <a:ea typeface="Microsoft GothicNeo"/>
+                <a:cs typeface="Microsoft GothicNeo"/>
+              </a:rPr>
+              <a:t>사용 → 각 </a:t>
+            </a:r>
+            <a:r>
+              <a:rPr lang="en-US" altLang="ko-KR" sz="1200" dirty="0">
+                <a:latin typeface="Microsoft GothicNeo"/>
+                <a:ea typeface="Microsoft GothicNeo"/>
+                <a:cs typeface="Microsoft GothicNeo"/>
+              </a:rPr>
+              <a:t>fold </a:t>
+            </a:r>
+            <a:r>
+              <a:rPr lang="ko-KR" altLang="en-US" sz="1200" dirty="0">
+                <a:latin typeface="Microsoft GothicNeo"/>
+                <a:ea typeface="Microsoft GothicNeo"/>
+                <a:cs typeface="Microsoft GothicNeo"/>
+              </a:rPr>
+              <a:t>마다 </a:t>
+            </a:r>
+            <a:r>
+              <a:rPr lang="en-US" altLang="ko-KR" sz="1200" dirty="0">
+                <a:latin typeface="Microsoft GothicNeo"/>
+                <a:ea typeface="Microsoft GothicNeo"/>
+                <a:cs typeface="Microsoft GothicNeo"/>
+              </a:rPr>
+              <a:t>TARGET </a:t>
+            </a:r>
+            <a:r>
+              <a:rPr lang="ko-KR" altLang="en-US" sz="1200" dirty="0">
+                <a:latin typeface="Microsoft GothicNeo"/>
+                <a:ea typeface="Microsoft GothicNeo"/>
+                <a:cs typeface="Microsoft GothicNeo"/>
+              </a:rPr>
+              <a:t>클래스 비율</a:t>
+            </a:r>
+            <a:r>
+              <a:rPr lang="en-US" altLang="ko-KR" sz="1200" dirty="0">
+                <a:latin typeface="Microsoft GothicNeo"/>
+                <a:ea typeface="Microsoft GothicNeo"/>
+                <a:cs typeface="Microsoft GothicNeo"/>
+              </a:rPr>
+              <a:t>,</a:t>
+            </a:r>
+            <a:r>
+              <a:rPr lang="ko-KR" altLang="en-US" sz="1200" dirty="0">
+                <a:latin typeface="Microsoft GothicNeo"/>
+                <a:ea typeface="Microsoft GothicNeo"/>
+                <a:cs typeface="Microsoft GothicNeo"/>
+              </a:rPr>
+              <a:t> 전체 데이터와 유사하게 유지되도록 층화 설정</a:t>
+            </a:r>
+            <a:endParaRPr lang="en-US" altLang="ko-KR" sz="1200" dirty="0">
+              <a:latin typeface="Microsoft GothicNeo"/>
+              <a:ea typeface="Microsoft GothicNeo"/>
+              <a:cs typeface="Microsoft GothicNeo"/>
+            </a:endParaRPr>
+          </a:p>
+          <a:p>
+            <a:pPr marL="800100" lvl="3" indent="-228600">
+              <a:lnSpc>
+                <a:spcPct val="150000"/>
+              </a:lnSpc>
+              <a:buFont typeface="Calibri"/>
+              <a:buChar char="-"/>
+            </a:pPr>
+            <a:r>
+              <a:rPr lang="en-US" altLang="ko-KR" sz="1200" dirty="0" err="1">
+                <a:latin typeface="Microsoft GothicNeo"/>
+                <a:ea typeface="Microsoft GothicNeo"/>
+                <a:cs typeface="Microsoft GothicNeo"/>
+              </a:rPr>
+              <a:t>HyperOpt</a:t>
+            </a:r>
+            <a:r>
+              <a:rPr lang="en-US" altLang="ko-KR" sz="1200" dirty="0">
+                <a:latin typeface="Microsoft GothicNeo"/>
+                <a:ea typeface="Microsoft GothicNeo"/>
+                <a:cs typeface="Microsoft GothicNeo"/>
+              </a:rPr>
+              <a:t> </a:t>
+            </a:r>
+            <a:r>
+              <a:rPr lang="ko-KR" altLang="en-US" sz="1200" dirty="0">
+                <a:latin typeface="Microsoft GothicNeo"/>
+                <a:ea typeface="Microsoft GothicNeo"/>
+                <a:cs typeface="Microsoft GothicNeo"/>
+              </a:rPr>
+              <a:t>및 </a:t>
+            </a:r>
+            <a:r>
+              <a:rPr lang="en-US" altLang="ko-KR" sz="1200" dirty="0" err="1">
+                <a:latin typeface="Microsoft GothicNeo"/>
+                <a:ea typeface="Microsoft GothicNeo"/>
+                <a:cs typeface="Microsoft GothicNeo"/>
+              </a:rPr>
+              <a:t>GridSearchCV</a:t>
+            </a:r>
+            <a:r>
+              <a:rPr lang="en-US" altLang="ko-KR" sz="1200" dirty="0">
+                <a:latin typeface="Microsoft GothicNeo"/>
+                <a:ea typeface="Microsoft GothicNeo"/>
+                <a:cs typeface="Microsoft GothicNeo"/>
+              </a:rPr>
+              <a:t> </a:t>
+            </a:r>
+            <a:r>
+              <a:rPr lang="ko-KR" altLang="en-US" sz="1200" dirty="0">
+                <a:latin typeface="Microsoft GothicNeo"/>
+                <a:ea typeface="Microsoft GothicNeo"/>
+                <a:cs typeface="Microsoft GothicNeo"/>
+              </a:rPr>
+              <a:t>에서 단일 </a:t>
+            </a:r>
+            <a:r>
+              <a:rPr lang="en-US" altLang="ko-KR" sz="1200" dirty="0">
+                <a:latin typeface="Microsoft GothicNeo"/>
+                <a:ea typeface="Microsoft GothicNeo"/>
+                <a:cs typeface="Microsoft GothicNeo"/>
+              </a:rPr>
+              <a:t>Train/Validation </a:t>
+            </a:r>
+            <a:r>
+              <a:rPr lang="ko-KR" altLang="en-US" sz="1200" dirty="0">
+                <a:latin typeface="Microsoft GothicNeo"/>
+                <a:ea typeface="Microsoft GothicNeo"/>
+                <a:cs typeface="Microsoft GothicNeo"/>
+              </a:rPr>
+              <a:t>분할에 의존하지 않는 안정적 성능 평가 수행</a:t>
+            </a:r>
+            <a:endParaRPr lang="en-US" altLang="ko-KR" sz="1200" dirty="0">
+              <a:latin typeface="Microsoft GothicNeo"/>
+              <a:ea typeface="Microsoft GothicNeo"/>
+              <a:cs typeface="Microsoft GothicNeo"/>
+            </a:endParaRPr>
+          </a:p>
+        </p:txBody>
+      </p:sp>
+      <p:sp>
+        <p:nvSpPr>
+          <p:cNvPr id="4" name="직사각형 3">
+            <a:extLst>
+              <a:ext uri="{FF2B5EF4-FFF2-40B4-BE49-F238E27FC236}">
+                <a16:creationId xmlns:a16="http://schemas.microsoft.com/office/drawing/2014/main" id="{0BC41E78-FD06-C9A8-51ED-846873A7EF0A}"/>
               </a:ext>
             </a:extLst>
           </p:cNvPr>
@@ -12500,7 +14050,7 @@
           <p:cNvPr id="5" name="그림 4" descr="File:Santander Logo.PNG - Wikimedia Commons">
             <a:extLst>
               <a:ext uri="{FF2B5EF4-FFF2-40B4-BE49-F238E27FC236}">
-                <a16:creationId xmlns:a16="http://schemas.microsoft.com/office/drawing/2014/main" id="{82924371-5262-D64D-F2BD-343C18DC272B}"/>
+                <a16:creationId xmlns:a16="http://schemas.microsoft.com/office/drawing/2014/main" id="{EAC3034C-1F9F-E124-7AA7-D7C069AD42E2}"/>
               </a:ext>
             </a:extLst>
           </p:cNvPr>
@@ -12525,10 +14075,556 @@
           </a:prstGeom>
         </p:spPr>
       </p:pic>
+      <p:graphicFrame>
+        <p:nvGraphicFramePr>
+          <p:cNvPr id="3" name="표 2">
+            <a:extLst>
+              <a:ext uri="{FF2B5EF4-FFF2-40B4-BE49-F238E27FC236}">
+                <a16:creationId xmlns:a16="http://schemas.microsoft.com/office/drawing/2014/main" id="{B271D184-E731-8D9B-99EF-F4673C5D8F38}"/>
+              </a:ext>
+            </a:extLst>
+          </p:cNvPr>
+          <p:cNvGraphicFramePr>
+            <a:graphicFrameLocks noGrp="1"/>
+          </p:cNvGraphicFramePr>
+          <p:nvPr>
+            <p:extLst>
+              <p:ext uri="{D42A27DB-BD31-4B8C-83A1-F6EECF244321}">
+                <p14:modId xmlns:p14="http://schemas.microsoft.com/office/powerpoint/2010/main" val="2081811236"/>
+              </p:ext>
+            </p:extLst>
+          </p:nvPr>
+        </p:nvGraphicFramePr>
+        <p:xfrm>
+          <a:off x="3305185" y="3421980"/>
+          <a:ext cx="5933038" cy="1624153"/>
+        </p:xfrm>
+        <a:graphic>
+          <a:graphicData uri="http://schemas.openxmlformats.org/drawingml/2006/table">
+            <a:tbl>
+              <a:tblPr firstRow="1" bandRow="1">
+                <a:tableStyleId>{5C22544A-7EE6-4342-B048-85BDC9FD1C3A}</a:tableStyleId>
+              </a:tblPr>
+              <a:tblGrid>
+                <a:gridCol w="5933038">
+                  <a:extLst>
+                    <a:ext uri="{9D8B030D-6E8A-4147-A177-3AD203B41FA5}">
+                      <a16:colId xmlns:a16="http://schemas.microsoft.com/office/drawing/2014/main" val="3138216807"/>
+                    </a:ext>
+                  </a:extLst>
+                </a:gridCol>
+              </a:tblGrid>
+              <a:tr h="1624153">
+                <a:tc>
+                  <a:txBody>
+                    <a:bodyPr/>
+                    <a:lstStyle/>
+                    <a:p>
+                      <a:pPr latinLnBrk="1">
+                        <a:lnSpc>
+                          <a:spcPct val="150000"/>
+                        </a:lnSpc>
+                      </a:pPr>
+                      <a:r>
+                        <a:rPr lang="en-US" altLang="ko-KR" sz="900" b="0" dirty="0" err="1">
+                          <a:solidFill>
+                            <a:schemeClr val="tx1"/>
+                          </a:solidFill>
+                          <a:latin typeface="Microsoft GothicNeo" panose="020B0500000101010101" pitchFamily="50" charset="-127"/>
+                          <a:ea typeface="Microsoft GothicNeo" panose="020B0500000101010101" pitchFamily="50" charset="-127"/>
+                          <a:cs typeface="Microsoft GothicNeo" panose="020B0500000101010101" pitchFamily="50" charset="-127"/>
+                        </a:rPr>
+                        <a:t>stacking_model</a:t>
+                      </a:r>
+                      <a:r>
+                        <a:rPr lang="en-US" altLang="ko-KR" sz="900" b="0" dirty="0">
+                          <a:solidFill>
+                            <a:schemeClr val="tx1"/>
+                          </a:solidFill>
+                          <a:latin typeface="Microsoft GothicNeo" panose="020B0500000101010101" pitchFamily="50" charset="-127"/>
+                          <a:ea typeface="Microsoft GothicNeo" panose="020B0500000101010101" pitchFamily="50" charset="-127"/>
+                          <a:cs typeface="Microsoft GothicNeo" panose="020B0500000101010101" pitchFamily="50" charset="-127"/>
+                        </a:rPr>
+                        <a:t> = </a:t>
+                      </a:r>
+                      <a:r>
+                        <a:rPr lang="en-US" altLang="ko-KR" sz="900" b="0" dirty="0" err="1">
+                          <a:solidFill>
+                            <a:schemeClr val="accent4"/>
+                          </a:solidFill>
+                          <a:latin typeface="Microsoft GothicNeo" panose="020B0500000101010101" pitchFamily="50" charset="-127"/>
+                          <a:ea typeface="Microsoft GothicNeo" panose="020B0500000101010101" pitchFamily="50" charset="-127"/>
+                          <a:cs typeface="Microsoft GothicNeo" panose="020B0500000101010101" pitchFamily="50" charset="-127"/>
+                        </a:rPr>
+                        <a:t>StackingClassifier</a:t>
+                      </a:r>
+                      <a:r>
+                        <a:rPr lang="en-US" altLang="ko-KR" sz="900" b="0" dirty="0">
+                          <a:solidFill>
+                            <a:schemeClr val="tx1"/>
+                          </a:solidFill>
+                          <a:latin typeface="Microsoft GothicNeo" panose="020B0500000101010101" pitchFamily="50" charset="-127"/>
+                          <a:ea typeface="Microsoft GothicNeo" panose="020B0500000101010101" pitchFamily="50" charset="-127"/>
+                          <a:cs typeface="Microsoft GothicNeo" panose="020B0500000101010101" pitchFamily="50" charset="-127"/>
+                        </a:rPr>
+                        <a:t>(</a:t>
+                      </a:r>
+                    </a:p>
+                    <a:p>
+                      <a:pPr latinLnBrk="1">
+                        <a:lnSpc>
+                          <a:spcPct val="150000"/>
+                        </a:lnSpc>
+                      </a:pPr>
+                      <a:r>
+                        <a:rPr lang="en-US" altLang="ko-KR" sz="900" b="0" dirty="0">
+                          <a:solidFill>
+                            <a:schemeClr val="tx1"/>
+                          </a:solidFill>
+                          <a:latin typeface="Microsoft GothicNeo" panose="020B0500000101010101" pitchFamily="50" charset="-127"/>
+                          <a:ea typeface="Microsoft GothicNeo" panose="020B0500000101010101" pitchFamily="50" charset="-127"/>
+                          <a:cs typeface="Microsoft GothicNeo" panose="020B0500000101010101" pitchFamily="50" charset="-127"/>
+                        </a:rPr>
+                        <a:t>    estimators      = [('rf', </a:t>
+                      </a:r>
+                      <a:r>
+                        <a:rPr lang="en-US" altLang="ko-KR" sz="900" b="0" dirty="0" err="1">
+                          <a:solidFill>
+                            <a:schemeClr val="tx1"/>
+                          </a:solidFill>
+                          <a:latin typeface="Microsoft GothicNeo" panose="020B0500000101010101" pitchFamily="50" charset="-127"/>
+                          <a:ea typeface="Microsoft GothicNeo" panose="020B0500000101010101" pitchFamily="50" charset="-127"/>
+                          <a:cs typeface="Microsoft GothicNeo" panose="020B0500000101010101" pitchFamily="50" charset="-127"/>
+                        </a:rPr>
+                        <a:t>rf_clf</a:t>
+                      </a:r>
+                      <a:r>
+                        <a:rPr lang="en-US" altLang="ko-KR" sz="900" b="0" dirty="0">
+                          <a:solidFill>
+                            <a:schemeClr val="tx1"/>
+                          </a:solidFill>
+                          <a:latin typeface="Microsoft GothicNeo" panose="020B0500000101010101" pitchFamily="50" charset="-127"/>
+                          <a:ea typeface="Microsoft GothicNeo" panose="020B0500000101010101" pitchFamily="50" charset="-127"/>
+                          <a:cs typeface="Microsoft GothicNeo" panose="020B0500000101010101" pitchFamily="50" charset="-127"/>
+                        </a:rPr>
+                        <a:t>), ('</a:t>
+                      </a:r>
+                      <a:r>
+                        <a:rPr lang="en-US" altLang="ko-KR" sz="900" b="0" dirty="0" err="1">
+                          <a:solidFill>
+                            <a:schemeClr val="tx1"/>
+                          </a:solidFill>
+                          <a:latin typeface="Microsoft GothicNeo" panose="020B0500000101010101" pitchFamily="50" charset="-127"/>
+                          <a:ea typeface="Microsoft GothicNeo" panose="020B0500000101010101" pitchFamily="50" charset="-127"/>
+                          <a:cs typeface="Microsoft GothicNeo" panose="020B0500000101010101" pitchFamily="50" charset="-127"/>
+                        </a:rPr>
+                        <a:t>xgb</a:t>
+                      </a:r>
+                      <a:r>
+                        <a:rPr lang="en-US" altLang="ko-KR" sz="900" b="0" dirty="0">
+                          <a:solidFill>
+                            <a:schemeClr val="tx1"/>
+                          </a:solidFill>
+                          <a:latin typeface="Microsoft GothicNeo" panose="020B0500000101010101" pitchFamily="50" charset="-127"/>
+                          <a:ea typeface="Microsoft GothicNeo" panose="020B0500000101010101" pitchFamily="50" charset="-127"/>
+                          <a:cs typeface="Microsoft GothicNeo" panose="020B0500000101010101" pitchFamily="50" charset="-127"/>
+                        </a:rPr>
+                        <a:t>', </a:t>
+                      </a:r>
+                      <a:r>
+                        <a:rPr lang="en-US" altLang="ko-KR" sz="900" b="0" dirty="0" err="1">
+                          <a:solidFill>
+                            <a:schemeClr val="tx1"/>
+                          </a:solidFill>
+                          <a:latin typeface="Microsoft GothicNeo" panose="020B0500000101010101" pitchFamily="50" charset="-127"/>
+                          <a:ea typeface="Microsoft GothicNeo" panose="020B0500000101010101" pitchFamily="50" charset="-127"/>
+                          <a:cs typeface="Microsoft GothicNeo" panose="020B0500000101010101" pitchFamily="50" charset="-127"/>
+                        </a:rPr>
+                        <a:t>xgb_clf</a:t>
+                      </a:r>
+                      <a:r>
+                        <a:rPr lang="en-US" altLang="ko-KR" sz="900" b="0" dirty="0">
+                          <a:solidFill>
+                            <a:schemeClr val="tx1"/>
+                          </a:solidFill>
+                          <a:latin typeface="Microsoft GothicNeo" panose="020B0500000101010101" pitchFamily="50" charset="-127"/>
+                          <a:ea typeface="Microsoft GothicNeo" panose="020B0500000101010101" pitchFamily="50" charset="-127"/>
+                          <a:cs typeface="Microsoft GothicNeo" panose="020B0500000101010101" pitchFamily="50" charset="-127"/>
+                        </a:rPr>
+                        <a:t>), ('</a:t>
+                      </a:r>
+                      <a:r>
+                        <a:rPr lang="en-US" altLang="ko-KR" sz="900" b="0" dirty="0" err="1">
+                          <a:solidFill>
+                            <a:schemeClr val="tx1"/>
+                          </a:solidFill>
+                          <a:latin typeface="Microsoft GothicNeo" panose="020B0500000101010101" pitchFamily="50" charset="-127"/>
+                          <a:ea typeface="Microsoft GothicNeo" panose="020B0500000101010101" pitchFamily="50" charset="-127"/>
+                          <a:cs typeface="Microsoft GothicNeo" panose="020B0500000101010101" pitchFamily="50" charset="-127"/>
+                        </a:rPr>
+                        <a:t>lgbm</a:t>
+                      </a:r>
+                      <a:r>
+                        <a:rPr lang="en-US" altLang="ko-KR" sz="900" b="0" dirty="0">
+                          <a:solidFill>
+                            <a:schemeClr val="tx1"/>
+                          </a:solidFill>
+                          <a:latin typeface="Microsoft GothicNeo" panose="020B0500000101010101" pitchFamily="50" charset="-127"/>
+                          <a:ea typeface="Microsoft GothicNeo" panose="020B0500000101010101" pitchFamily="50" charset="-127"/>
+                          <a:cs typeface="Microsoft GothicNeo" panose="020B0500000101010101" pitchFamily="50" charset="-127"/>
+                        </a:rPr>
+                        <a:t>', </a:t>
+                      </a:r>
+                      <a:r>
+                        <a:rPr lang="en-US" altLang="ko-KR" sz="900" b="0" dirty="0" err="1">
+                          <a:solidFill>
+                            <a:schemeClr val="tx1"/>
+                          </a:solidFill>
+                          <a:latin typeface="Microsoft GothicNeo" panose="020B0500000101010101" pitchFamily="50" charset="-127"/>
+                          <a:ea typeface="Microsoft GothicNeo" panose="020B0500000101010101" pitchFamily="50" charset="-127"/>
+                          <a:cs typeface="Microsoft GothicNeo" panose="020B0500000101010101" pitchFamily="50" charset="-127"/>
+                        </a:rPr>
+                        <a:t>lgbm_clf</a:t>
+                      </a:r>
+                      <a:r>
+                        <a:rPr lang="en-US" altLang="ko-KR" sz="900" b="0" dirty="0">
+                          <a:solidFill>
+                            <a:schemeClr val="tx1"/>
+                          </a:solidFill>
+                          <a:latin typeface="Microsoft GothicNeo" panose="020B0500000101010101" pitchFamily="50" charset="-127"/>
+                          <a:ea typeface="Microsoft GothicNeo" panose="020B0500000101010101" pitchFamily="50" charset="-127"/>
+                          <a:cs typeface="Microsoft GothicNeo" panose="020B0500000101010101" pitchFamily="50" charset="-127"/>
+                        </a:rPr>
+                        <a:t>)],</a:t>
+                      </a:r>
+                    </a:p>
+                    <a:p>
+                      <a:pPr latinLnBrk="1">
+                        <a:lnSpc>
+                          <a:spcPct val="150000"/>
+                        </a:lnSpc>
+                      </a:pPr>
+                      <a:r>
+                        <a:rPr lang="en-US" altLang="ko-KR" sz="900" b="0" dirty="0">
+                          <a:solidFill>
+                            <a:schemeClr val="tx1"/>
+                          </a:solidFill>
+                          <a:latin typeface="Microsoft GothicNeo" panose="020B0500000101010101" pitchFamily="50" charset="-127"/>
+                          <a:ea typeface="Microsoft GothicNeo" panose="020B0500000101010101" pitchFamily="50" charset="-127"/>
+                          <a:cs typeface="Microsoft GothicNeo" panose="020B0500000101010101" pitchFamily="50" charset="-127"/>
+                        </a:rPr>
+                        <a:t>    </a:t>
+                      </a:r>
+                      <a:r>
+                        <a:rPr lang="en-US" altLang="ko-KR" sz="900" b="0" dirty="0" err="1">
+                          <a:solidFill>
+                            <a:schemeClr val="tx1"/>
+                          </a:solidFill>
+                          <a:latin typeface="Microsoft GothicNeo" panose="020B0500000101010101" pitchFamily="50" charset="-127"/>
+                          <a:ea typeface="Microsoft GothicNeo" panose="020B0500000101010101" pitchFamily="50" charset="-127"/>
+                          <a:cs typeface="Microsoft GothicNeo" panose="020B0500000101010101" pitchFamily="50" charset="-127"/>
+                        </a:rPr>
+                        <a:t>final_estimator</a:t>
+                      </a:r>
+                      <a:r>
+                        <a:rPr lang="en-US" altLang="ko-KR" sz="900" b="0" dirty="0">
+                          <a:solidFill>
+                            <a:schemeClr val="tx1"/>
+                          </a:solidFill>
+                          <a:latin typeface="Microsoft GothicNeo" panose="020B0500000101010101" pitchFamily="50" charset="-127"/>
+                          <a:ea typeface="Microsoft GothicNeo" panose="020B0500000101010101" pitchFamily="50" charset="-127"/>
+                          <a:cs typeface="Microsoft GothicNeo" panose="020B0500000101010101" pitchFamily="50" charset="-127"/>
+                        </a:rPr>
+                        <a:t> = </a:t>
+                      </a:r>
+                      <a:r>
+                        <a:rPr lang="en-US" altLang="ko-KR" sz="900" b="0" dirty="0" err="1">
+                          <a:solidFill>
+                            <a:schemeClr val="tx1"/>
+                          </a:solidFill>
+                          <a:latin typeface="Microsoft GothicNeo" panose="020B0500000101010101" pitchFamily="50" charset="-127"/>
+                          <a:ea typeface="Microsoft GothicNeo" panose="020B0500000101010101" pitchFamily="50" charset="-127"/>
+                          <a:cs typeface="Microsoft GothicNeo" panose="020B0500000101010101" pitchFamily="50" charset="-127"/>
+                        </a:rPr>
+                        <a:t>meta_model</a:t>
+                      </a:r>
+                      <a:r>
+                        <a:rPr lang="en-US" altLang="ko-KR" sz="900" b="0" dirty="0">
+                          <a:solidFill>
+                            <a:schemeClr val="tx1"/>
+                          </a:solidFill>
+                          <a:latin typeface="Microsoft GothicNeo" panose="020B0500000101010101" pitchFamily="50" charset="-127"/>
+                          <a:ea typeface="Microsoft GothicNeo" panose="020B0500000101010101" pitchFamily="50" charset="-127"/>
+                          <a:cs typeface="Microsoft GothicNeo" panose="020B0500000101010101" pitchFamily="50" charset="-127"/>
+                        </a:rPr>
+                        <a:t>,</a:t>
+                      </a:r>
+                    </a:p>
+                    <a:p>
+                      <a:pPr latinLnBrk="1">
+                        <a:lnSpc>
+                          <a:spcPct val="150000"/>
+                        </a:lnSpc>
+                      </a:pPr>
+                      <a:r>
+                        <a:rPr lang="en-US" altLang="ko-KR" sz="900" b="0" dirty="0">
+                          <a:solidFill>
+                            <a:schemeClr val="tx1"/>
+                          </a:solidFill>
+                          <a:latin typeface="Microsoft GothicNeo" panose="020B0500000101010101" pitchFamily="50" charset="-127"/>
+                          <a:ea typeface="Microsoft GothicNeo" panose="020B0500000101010101" pitchFamily="50" charset="-127"/>
+                          <a:cs typeface="Microsoft GothicNeo" panose="020B0500000101010101" pitchFamily="50" charset="-127"/>
+                        </a:rPr>
+                        <a:t>    cv              = </a:t>
+                      </a:r>
+                      <a:r>
+                        <a:rPr lang="en-US" altLang="ko-KR" sz="900" b="0" dirty="0" err="1">
+                          <a:solidFill>
+                            <a:schemeClr val="tx1"/>
+                          </a:solidFill>
+                          <a:latin typeface="Microsoft GothicNeo" panose="020B0500000101010101" pitchFamily="50" charset="-127"/>
+                          <a:ea typeface="Microsoft GothicNeo" panose="020B0500000101010101" pitchFamily="50" charset="-127"/>
+                          <a:cs typeface="Microsoft GothicNeo" panose="020B0500000101010101" pitchFamily="50" charset="-127"/>
+                        </a:rPr>
+                        <a:t>StratifiedKFold</a:t>
+                      </a:r>
+                      <a:r>
+                        <a:rPr lang="en-US" altLang="ko-KR" sz="900" b="0" dirty="0">
+                          <a:solidFill>
+                            <a:schemeClr val="tx1"/>
+                          </a:solidFill>
+                          <a:latin typeface="Microsoft GothicNeo" panose="020B0500000101010101" pitchFamily="50" charset="-127"/>
+                          <a:ea typeface="Microsoft GothicNeo" panose="020B0500000101010101" pitchFamily="50" charset="-127"/>
+                          <a:cs typeface="Microsoft GothicNeo" panose="020B0500000101010101" pitchFamily="50" charset="-127"/>
+                        </a:rPr>
+                        <a:t>(</a:t>
+                      </a:r>
+                      <a:r>
+                        <a:rPr lang="en-US" altLang="ko-KR" sz="900" b="0" dirty="0" err="1">
+                          <a:solidFill>
+                            <a:schemeClr val="tx1"/>
+                          </a:solidFill>
+                          <a:latin typeface="Microsoft GothicNeo" panose="020B0500000101010101" pitchFamily="50" charset="-127"/>
+                          <a:ea typeface="Microsoft GothicNeo" panose="020B0500000101010101" pitchFamily="50" charset="-127"/>
+                          <a:cs typeface="Microsoft GothicNeo" panose="020B0500000101010101" pitchFamily="50" charset="-127"/>
+                        </a:rPr>
+                        <a:t>n_splits</a:t>
+                      </a:r>
+                      <a:r>
+                        <a:rPr lang="en-US" altLang="ko-KR" sz="900" b="0" dirty="0">
+                          <a:solidFill>
+                            <a:schemeClr val="tx1"/>
+                          </a:solidFill>
+                          <a:latin typeface="Microsoft GothicNeo" panose="020B0500000101010101" pitchFamily="50" charset="-127"/>
+                          <a:ea typeface="Microsoft GothicNeo" panose="020B0500000101010101" pitchFamily="50" charset="-127"/>
+                          <a:cs typeface="Microsoft GothicNeo" panose="020B0500000101010101" pitchFamily="50" charset="-127"/>
+                        </a:rPr>
+                        <a:t>=5, shuffle=True, </a:t>
+                      </a:r>
+                      <a:r>
+                        <a:rPr lang="en-US" altLang="ko-KR" sz="900" b="0" dirty="0" err="1">
+                          <a:solidFill>
+                            <a:schemeClr val="tx1"/>
+                          </a:solidFill>
+                          <a:latin typeface="Microsoft GothicNeo" panose="020B0500000101010101" pitchFamily="50" charset="-127"/>
+                          <a:ea typeface="Microsoft GothicNeo" panose="020B0500000101010101" pitchFamily="50" charset="-127"/>
+                          <a:cs typeface="Microsoft GothicNeo" panose="020B0500000101010101" pitchFamily="50" charset="-127"/>
+                        </a:rPr>
+                        <a:t>random_state</a:t>
+                      </a:r>
+                      <a:r>
+                        <a:rPr lang="en-US" altLang="ko-KR" sz="900" b="0" dirty="0">
+                          <a:solidFill>
+                            <a:schemeClr val="tx1"/>
+                          </a:solidFill>
+                          <a:latin typeface="Microsoft GothicNeo" panose="020B0500000101010101" pitchFamily="50" charset="-127"/>
+                          <a:ea typeface="Microsoft GothicNeo" panose="020B0500000101010101" pitchFamily="50" charset="-127"/>
+                          <a:cs typeface="Microsoft GothicNeo" panose="020B0500000101010101" pitchFamily="50" charset="-127"/>
+                        </a:rPr>
+                        <a:t>=42),</a:t>
+                      </a:r>
+                    </a:p>
+                    <a:p>
+                      <a:pPr latinLnBrk="1">
+                        <a:lnSpc>
+                          <a:spcPct val="150000"/>
+                        </a:lnSpc>
+                      </a:pPr>
+                      <a:r>
+                        <a:rPr lang="en-US" altLang="ko-KR" sz="900" b="0" dirty="0">
+                          <a:solidFill>
+                            <a:schemeClr val="tx1"/>
+                          </a:solidFill>
+                          <a:latin typeface="Microsoft GothicNeo" panose="020B0500000101010101" pitchFamily="50" charset="-127"/>
+                          <a:ea typeface="Microsoft GothicNeo" panose="020B0500000101010101" pitchFamily="50" charset="-127"/>
+                          <a:cs typeface="Microsoft GothicNeo" panose="020B0500000101010101" pitchFamily="50" charset="-127"/>
+                        </a:rPr>
+                        <a:t>    </a:t>
+                      </a:r>
+                      <a:r>
+                        <a:rPr lang="en-US" altLang="ko-KR" sz="900" b="0" dirty="0" err="1">
+                          <a:solidFill>
+                            <a:schemeClr val="tx1"/>
+                          </a:solidFill>
+                          <a:latin typeface="Microsoft GothicNeo" panose="020B0500000101010101" pitchFamily="50" charset="-127"/>
+                          <a:ea typeface="Microsoft GothicNeo" panose="020B0500000101010101" pitchFamily="50" charset="-127"/>
+                          <a:cs typeface="Microsoft GothicNeo" panose="020B0500000101010101" pitchFamily="50" charset="-127"/>
+                        </a:rPr>
+                        <a:t>n_jobs</a:t>
+                      </a:r>
+                      <a:r>
+                        <a:rPr lang="en-US" altLang="ko-KR" sz="900" b="0" dirty="0">
+                          <a:solidFill>
+                            <a:schemeClr val="tx1"/>
+                          </a:solidFill>
+                          <a:latin typeface="Microsoft GothicNeo" panose="020B0500000101010101" pitchFamily="50" charset="-127"/>
+                          <a:ea typeface="Microsoft GothicNeo" panose="020B0500000101010101" pitchFamily="50" charset="-127"/>
+                          <a:cs typeface="Microsoft GothicNeo" panose="020B0500000101010101" pitchFamily="50" charset="-127"/>
+                        </a:rPr>
+                        <a:t>          = -1</a:t>
+                      </a:r>
+                    </a:p>
+                    <a:p>
+                      <a:pPr latinLnBrk="1">
+                        <a:lnSpc>
+                          <a:spcPct val="150000"/>
+                        </a:lnSpc>
+                      </a:pPr>
+                      <a:r>
+                        <a:rPr lang="en-US" altLang="ko-KR" sz="900" b="0" dirty="0">
+                          <a:solidFill>
+                            <a:schemeClr val="tx1"/>
+                          </a:solidFill>
+                          <a:latin typeface="Microsoft GothicNeo" panose="020B0500000101010101" pitchFamily="50" charset="-127"/>
+                          <a:ea typeface="Microsoft GothicNeo" panose="020B0500000101010101" pitchFamily="50" charset="-127"/>
+                          <a:cs typeface="Microsoft GothicNeo" panose="020B0500000101010101" pitchFamily="50" charset="-127"/>
+                        </a:rPr>
+                        <a:t>)</a:t>
+                      </a:r>
+                    </a:p>
+                  </a:txBody>
+                  <a:tcPr>
+                    <a:lnL w="28575" cap="flat" cmpd="sng" algn="ctr">
+                      <a:solidFill>
+                        <a:schemeClr val="accent4"/>
+                      </a:solidFill>
+                      <a:prstDash val="solid"/>
+                      <a:round/>
+                      <a:headEnd type="none" w="med" len="med"/>
+                      <a:tailEnd type="none" w="med" len="med"/>
+                    </a:lnL>
+                    <a:solidFill>
+                      <a:schemeClr val="bg2"/>
+                    </a:solidFill>
+                  </a:tcPr>
+                </a:tc>
+                <a:extLst>
+                  <a:ext uri="{0D108BD9-81ED-4DB2-BD59-A6C34878D82A}">
+                    <a16:rowId xmlns:a16="http://schemas.microsoft.com/office/drawing/2014/main" val="3261029982"/>
+                  </a:ext>
+                </a:extLst>
+              </a:tr>
+            </a:tbl>
+          </a:graphicData>
+        </a:graphic>
+      </p:graphicFrame>
+      <p:sp>
+        <p:nvSpPr>
+          <p:cNvPr id="6" name="TextBox 5">
+            <a:extLst>
+              <a:ext uri="{FF2B5EF4-FFF2-40B4-BE49-F238E27FC236}">
+                <a16:creationId xmlns:a16="http://schemas.microsoft.com/office/drawing/2014/main" id="{EC14AB18-D293-7B5F-3A67-6832DA24033E}"/>
+              </a:ext>
+            </a:extLst>
+          </p:cNvPr>
+          <p:cNvSpPr txBox="1"/>
+          <p:nvPr/>
+        </p:nvSpPr>
+        <p:spPr>
+          <a:xfrm>
+            <a:off x="3060589" y="3133027"/>
+            <a:ext cx="6422230" cy="261610"/>
+          </a:xfrm>
+          <a:prstGeom prst="rect">
+            <a:avLst/>
+          </a:prstGeom>
+          <a:noFill/>
+        </p:spPr>
+        <p:txBody>
+          <a:bodyPr wrap="square">
+            <a:spAutoFit/>
+          </a:bodyPr>
+          <a:lstStyle/>
+          <a:p>
+            <a:pPr algn="ctr"/>
+            <a:r>
+              <a:rPr lang="en-US" altLang="ko-KR" sz="1100" dirty="0">
+                <a:latin typeface="Microsoft GothicNeo" panose="020B0500000101010101" pitchFamily="50" charset="-127"/>
+                <a:ea typeface="Microsoft GothicNeo" panose="020B0500000101010101" pitchFamily="50" charset="-127"/>
+                <a:cs typeface="Microsoft GothicNeo" panose="020B0500000101010101" pitchFamily="50" charset="-127"/>
+              </a:rPr>
+              <a:t>[ </a:t>
+            </a:r>
+            <a:r>
+              <a:rPr lang="ko-KR" altLang="en-US" sz="1100" dirty="0">
+                <a:latin typeface="Microsoft GothicNeo" panose="020B0500000101010101" pitchFamily="50" charset="-127"/>
+                <a:ea typeface="Microsoft GothicNeo" panose="020B0500000101010101" pitchFamily="50" charset="-127"/>
+                <a:cs typeface="Microsoft GothicNeo" panose="020B0500000101010101" pitchFamily="50" charset="-127"/>
+              </a:rPr>
+              <a:t>표</a:t>
+            </a:r>
+            <a:r>
+              <a:rPr lang="en-US" altLang="ko-KR" sz="1100" dirty="0">
+                <a:latin typeface="Microsoft GothicNeo" panose="020B0500000101010101" pitchFamily="50" charset="-127"/>
+                <a:ea typeface="Microsoft GothicNeo" panose="020B0500000101010101" pitchFamily="50" charset="-127"/>
+                <a:cs typeface="Microsoft GothicNeo" panose="020B0500000101010101" pitchFamily="50" charset="-127"/>
+              </a:rPr>
+              <a:t> 2.7 </a:t>
+            </a:r>
+            <a:r>
+              <a:rPr lang="en-US" altLang="ko-KR" sz="1100" dirty="0" err="1">
+                <a:latin typeface="Microsoft GothicNeo" panose="020B0500000101010101" pitchFamily="50" charset="-127"/>
+                <a:ea typeface="Microsoft GothicNeo" panose="020B0500000101010101" pitchFamily="50" charset="-127"/>
+                <a:cs typeface="Microsoft GothicNeo" panose="020B0500000101010101" pitchFamily="50" charset="-127"/>
+              </a:rPr>
+              <a:t>StratifiedKfold</a:t>
+            </a:r>
+            <a:r>
+              <a:rPr lang="en-US" altLang="ko-KR" sz="1100" dirty="0">
+                <a:latin typeface="Microsoft GothicNeo" panose="020B0500000101010101" pitchFamily="50" charset="-127"/>
+                <a:ea typeface="Microsoft GothicNeo" panose="020B0500000101010101" pitchFamily="50" charset="-127"/>
+                <a:cs typeface="Microsoft GothicNeo" panose="020B0500000101010101" pitchFamily="50" charset="-127"/>
+              </a:rPr>
+              <a:t> </a:t>
+            </a:r>
+            <a:r>
+              <a:rPr lang="ko-KR" altLang="en-US" sz="1100" dirty="0">
+                <a:latin typeface="Microsoft GothicNeo" panose="020B0500000101010101" pitchFamily="50" charset="-127"/>
+                <a:ea typeface="Microsoft GothicNeo" panose="020B0500000101010101" pitchFamily="50" charset="-127"/>
+                <a:cs typeface="Microsoft GothicNeo" panose="020B0500000101010101" pitchFamily="50" charset="-127"/>
+              </a:rPr>
+              <a:t>기반 교차검증 사용 적용 함수</a:t>
+            </a:r>
+            <a:r>
+              <a:rPr lang="en-US" altLang="ko-KR" sz="1100" dirty="0">
+                <a:latin typeface="Microsoft GothicNeo" panose="020B0500000101010101" pitchFamily="50" charset="-127"/>
+                <a:ea typeface="Microsoft GothicNeo" panose="020B0500000101010101" pitchFamily="50" charset="-127"/>
+                <a:cs typeface="Microsoft GothicNeo" panose="020B0500000101010101" pitchFamily="50" charset="-127"/>
+              </a:rPr>
+              <a:t>]</a:t>
+            </a:r>
+            <a:endParaRPr lang="ko-KR" altLang="en-US" sz="1100" dirty="0">
+              <a:latin typeface="Microsoft GothicNeo" panose="020B0500000101010101" pitchFamily="50" charset="-127"/>
+              <a:ea typeface="Microsoft GothicNeo" panose="020B0500000101010101" pitchFamily="50" charset="-127"/>
+              <a:cs typeface="Microsoft GothicNeo" panose="020B0500000101010101" pitchFamily="50" charset="-127"/>
+            </a:endParaRPr>
+          </a:p>
+        </p:txBody>
+      </p:sp>
     </p:spTree>
     <p:extLst>
       <p:ext uri="{BB962C8B-B14F-4D97-AF65-F5344CB8AC3E}">
-        <p14:creationId xmlns:p14="http://schemas.microsoft.com/office/powerpoint/2010/main" val="1393844913"/>
+        <p14:creationId xmlns:p14="http://schemas.microsoft.com/office/powerpoint/2010/main" val="402463574"/>
       </p:ext>
     </p:extLst>
   </p:cSld>
@@ -12538,7 +14634,1112 @@
 </p:sld>
 </file>
 
-<file path=ppt/slides/slide16.xml><?xml version="1.0" encoding="utf-8"?>
+<file path=ppt/slides/slide17.xml><?xml version="1.0" encoding="utf-8"?>
+<p:sld xmlns:a="http://schemas.openxmlformats.org/drawingml/2006/main" xmlns:r="http://schemas.openxmlformats.org/officeDocument/2006/relationships" xmlns:p="http://schemas.openxmlformats.org/presentationml/2006/main">
+  <p:cSld>
+    <p:spTree>
+      <p:nvGrpSpPr>
+        <p:cNvPr id="1" name="">
+          <a:extLst>
+            <a:ext uri="{FF2B5EF4-FFF2-40B4-BE49-F238E27FC236}">
+              <a16:creationId xmlns:a16="http://schemas.microsoft.com/office/drawing/2014/main" id="{153DB0DD-D21C-308B-8C5D-1E04EAFF32BF}"/>
+            </a:ext>
+          </a:extLst>
+        </p:cNvPr>
+        <p:cNvGrpSpPr/>
+        <p:nvPr/>
+      </p:nvGrpSpPr>
+      <p:grpSpPr>
+        <a:xfrm>
+          <a:off x="0" y="0"/>
+          <a:ext cx="0" cy="0"/>
+          <a:chOff x="0" y="0"/>
+          <a:chExt cx="0" cy="0"/>
+        </a:xfrm>
+      </p:grpSpPr>
+      <p:sp>
+        <p:nvSpPr>
+          <p:cNvPr id="8" name="직사각형 7">
+            <a:extLst>
+              <a:ext uri="{FF2B5EF4-FFF2-40B4-BE49-F238E27FC236}">
+                <a16:creationId xmlns:a16="http://schemas.microsoft.com/office/drawing/2014/main" id="{09B7374F-85AB-30B9-6C42-AAF0C18A99BE}"/>
+              </a:ext>
+            </a:extLst>
+          </p:cNvPr>
+          <p:cNvSpPr/>
+          <p:nvPr/>
+        </p:nvSpPr>
+        <p:spPr>
+          <a:xfrm>
+            <a:off x="-169334" y="-105030"/>
+            <a:ext cx="12848166" cy="761198"/>
+          </a:xfrm>
+          <a:prstGeom prst="rect">
+            <a:avLst/>
+          </a:prstGeom>
+          <a:solidFill>
+            <a:schemeClr val="bg1">
+              <a:lumMod val="95000"/>
+            </a:schemeClr>
+          </a:solidFill>
+          <a:ln>
+            <a:noFill/>
+          </a:ln>
+        </p:spPr>
+        <p:style>
+          <a:lnRef idx="2">
+            <a:schemeClr val="accent1">
+              <a:shade val="15000"/>
+            </a:schemeClr>
+          </a:lnRef>
+          <a:fillRef idx="1">
+            <a:schemeClr val="accent1"/>
+          </a:fillRef>
+          <a:effectRef idx="0">
+            <a:schemeClr val="accent1"/>
+          </a:effectRef>
+          <a:fontRef idx="minor">
+            <a:schemeClr val="lt1"/>
+          </a:fontRef>
+        </p:style>
+        <p:txBody>
+          <a:bodyPr rtlCol="0" anchor="ctr"/>
+          <a:lstStyle/>
+          <a:p>
+            <a:pPr algn="ctr"/>
+            <a:endParaRPr lang="ko-KR" altLang="en-US"/>
+          </a:p>
+        </p:txBody>
+      </p:sp>
+      <p:sp>
+        <p:nvSpPr>
+          <p:cNvPr id="7" name="TextBox 6">
+            <a:extLst>
+              <a:ext uri="{FF2B5EF4-FFF2-40B4-BE49-F238E27FC236}">
+                <a16:creationId xmlns:a16="http://schemas.microsoft.com/office/drawing/2014/main" id="{C506B919-8D35-471D-A9BA-07EE83DD09BF}"/>
+              </a:ext>
+            </a:extLst>
+          </p:cNvPr>
+          <p:cNvSpPr txBox="1"/>
+          <p:nvPr/>
+        </p:nvSpPr>
+        <p:spPr>
+          <a:xfrm>
+            <a:off x="-2" y="179916"/>
+            <a:ext cx="7217832" cy="477054"/>
+          </a:xfrm>
+          <a:prstGeom prst="rect">
+            <a:avLst/>
+          </a:prstGeom>
+          <a:noFill/>
+          <a:ln>
+            <a:noFill/>
+          </a:ln>
+        </p:spPr>
+        <p:txBody>
+          <a:bodyPr rot="0" spcFirstLastPara="0" vertOverflow="overflow" horzOverflow="overflow" vert="horz" wrap="square" lIns="91440" tIns="45720" rIns="91440" bIns="45720" numCol="1" spcCol="0" rtlCol="0" fromWordArt="0" anchor="t" anchorCtr="0" forceAA="0" compatLnSpc="1">
+            <a:prstTxWarp prst="textNoShape">
+              <a:avLst/>
+            </a:prstTxWarp>
+            <a:spAutoFit/>
+          </a:bodyPr>
+          <a:lstStyle/>
+          <a:p>
+            <a:r>
+              <a:rPr lang="ko-KR" altLang="en-US" sz="2500" dirty="0">
+                <a:solidFill>
+                  <a:srgbClr val="747474"/>
+                </a:solidFill>
+                <a:latin typeface="Microsoft GothicNeo"/>
+                <a:ea typeface="Microsoft GothicNeo"/>
+                <a:cs typeface="Arial"/>
+              </a:rPr>
+              <a:t>02-</a:t>
+            </a:r>
+            <a:r>
+              <a:rPr lang="en-US" altLang="ko-KR" sz="2500" dirty="0">
+                <a:solidFill>
+                  <a:srgbClr val="747474"/>
+                </a:solidFill>
+                <a:latin typeface="Microsoft GothicNeo"/>
+                <a:ea typeface="Microsoft GothicNeo"/>
+                <a:cs typeface="Arial"/>
+              </a:rPr>
+              <a:t>7</a:t>
+            </a:r>
+            <a:r>
+              <a:rPr lang="ko-KR" altLang="en-US" sz="2500" dirty="0">
+                <a:solidFill>
+                  <a:srgbClr val="747474"/>
+                </a:solidFill>
+                <a:latin typeface="Microsoft GothicNeo"/>
+                <a:ea typeface="Microsoft GothicNeo"/>
+                <a:cs typeface="Arial"/>
+              </a:rPr>
+              <a:t> 모델링</a:t>
+            </a:r>
+            <a:r>
+              <a:rPr lang="en-US" altLang="ko-KR" sz="2500" dirty="0">
+                <a:solidFill>
+                  <a:srgbClr val="747474"/>
+                </a:solidFill>
+                <a:latin typeface="Microsoft GothicNeo"/>
+                <a:ea typeface="Microsoft GothicNeo"/>
+                <a:cs typeface="Arial"/>
+              </a:rPr>
+              <a:t>(2)</a:t>
+            </a:r>
+            <a:endParaRPr lang="ko-KR" altLang="en-US" sz="2500" dirty="0">
+              <a:solidFill>
+                <a:srgbClr val="747474"/>
+              </a:solidFill>
+              <a:latin typeface="Microsoft GothicNeo"/>
+              <a:ea typeface="Microsoft GothicNeo"/>
+              <a:cs typeface="Arial"/>
+            </a:endParaRPr>
+          </a:p>
+        </p:txBody>
+      </p:sp>
+      <p:sp>
+        <p:nvSpPr>
+          <p:cNvPr id="2" name="TextBox 1">
+            <a:extLst>
+              <a:ext uri="{FF2B5EF4-FFF2-40B4-BE49-F238E27FC236}">
+                <a16:creationId xmlns:a16="http://schemas.microsoft.com/office/drawing/2014/main" id="{BC0D812E-C10F-0756-3143-C3B0BCCA0CB1}"/>
+              </a:ext>
+            </a:extLst>
+          </p:cNvPr>
+          <p:cNvSpPr txBox="1"/>
+          <p:nvPr/>
+        </p:nvSpPr>
+        <p:spPr>
+          <a:xfrm>
+            <a:off x="613832" y="941917"/>
+            <a:ext cx="10816167" cy="1929246"/>
+          </a:xfrm>
+          <a:prstGeom prst="rect">
+            <a:avLst/>
+          </a:prstGeom>
+          <a:noFill/>
+        </p:spPr>
+        <p:txBody>
+          <a:bodyPr rot="0" spcFirstLastPara="0" vertOverflow="overflow" horzOverflow="overflow" vert="horz" wrap="square" lIns="91440" tIns="45720" rIns="91440" bIns="45720" numCol="1" spcCol="0" rtlCol="0" fromWordArt="0" anchor="t" anchorCtr="0" forceAA="0" compatLnSpc="1">
+            <a:prstTxWarp prst="textNoShape">
+              <a:avLst/>
+            </a:prstTxWarp>
+            <a:spAutoFit/>
+          </a:bodyPr>
+          <a:lstStyle/>
+          <a:p>
+            <a:pPr marL="285750" indent="-285750">
+              <a:lnSpc>
+                <a:spcPct val="150000"/>
+              </a:lnSpc>
+              <a:buFont typeface="Wingdings"/>
+              <a:buChar char="q"/>
+            </a:pPr>
+            <a:r>
+              <a:rPr lang="en-US" altLang="ko-KR" dirty="0">
+                <a:latin typeface="Microsoft GothicNeo"/>
+                <a:ea typeface="Microsoft GothicNeo"/>
+                <a:cs typeface="Microsoft GothicNeo"/>
+              </a:rPr>
+              <a:t> 8:2 </a:t>
+            </a:r>
+            <a:r>
+              <a:rPr lang="ko-KR" altLang="en-US" dirty="0">
+                <a:latin typeface="Microsoft GothicNeo"/>
+                <a:ea typeface="Microsoft GothicNeo"/>
+                <a:cs typeface="Microsoft GothicNeo"/>
+              </a:rPr>
+              <a:t>학습</a:t>
+            </a:r>
+            <a:r>
+              <a:rPr lang="en-US" altLang="ko-KR" dirty="0">
+                <a:latin typeface="Microsoft GothicNeo"/>
+                <a:ea typeface="Microsoft GothicNeo"/>
+                <a:cs typeface="Microsoft GothicNeo"/>
+              </a:rPr>
+              <a:t>/</a:t>
+            </a:r>
+            <a:r>
+              <a:rPr lang="ko-KR" altLang="en-US" dirty="0">
+                <a:latin typeface="Microsoft GothicNeo"/>
+                <a:ea typeface="Microsoft GothicNeo"/>
+                <a:cs typeface="Microsoft GothicNeo"/>
+              </a:rPr>
+              <a:t>검증 데이터 분할</a:t>
+            </a:r>
+          </a:p>
+          <a:p>
+            <a:pPr marL="400050" lvl="2" indent="228600">
+              <a:lnSpc>
+                <a:spcPct val="150000"/>
+              </a:lnSpc>
+              <a:buFont typeface="Wingdings,Sans-Serif"/>
+              <a:buChar char="§"/>
+            </a:pPr>
+            <a:r>
+              <a:rPr lang="en-US" altLang="ko-KR" sz="1300" dirty="0">
+                <a:latin typeface="Microsoft GothicNeo"/>
+                <a:ea typeface="Microsoft GothicNeo"/>
+                <a:cs typeface="Microsoft GothicNeo"/>
+              </a:rPr>
+              <a:t>var3</a:t>
+            </a:r>
+            <a:r>
+              <a:rPr lang="ko-KR" altLang="en-US" sz="1300" dirty="0">
+                <a:latin typeface="Microsoft GothicNeo"/>
+                <a:ea typeface="Microsoft GothicNeo"/>
+                <a:cs typeface="Microsoft GothicNeo"/>
+              </a:rPr>
+              <a:t> 피처 </a:t>
+            </a:r>
+            <a:r>
+              <a:rPr lang="en-US" altLang="ko-KR" sz="1300" dirty="0" err="1">
+                <a:latin typeface="Microsoft GothicNeo"/>
+                <a:ea typeface="Microsoft GothicNeo"/>
+                <a:cs typeface="Microsoft GothicNeo"/>
+              </a:rPr>
+              <a:t>descrie</a:t>
+            </a:r>
+            <a:r>
+              <a:rPr lang="en-US" altLang="ko-KR" sz="1300" dirty="0">
+                <a:latin typeface="Microsoft GothicNeo"/>
+                <a:ea typeface="Microsoft GothicNeo"/>
+                <a:cs typeface="Microsoft GothicNeo"/>
+              </a:rPr>
+              <a:t>() </a:t>
+            </a:r>
+            <a:r>
+              <a:rPr lang="ko-KR" altLang="en-US" sz="1300" dirty="0">
+                <a:latin typeface="Microsoft GothicNeo"/>
+                <a:ea typeface="Microsoft GothicNeo"/>
+                <a:cs typeface="Microsoft GothicNeo"/>
+              </a:rPr>
+              <a:t>를 통해 </a:t>
+            </a:r>
+            <a:r>
+              <a:rPr lang="ko-KR" altLang="en-US" sz="1300" dirty="0">
+                <a:solidFill>
+                  <a:srgbClr val="C00000"/>
+                </a:solidFill>
+                <a:latin typeface="Microsoft GothicNeo"/>
+                <a:ea typeface="Microsoft GothicNeo"/>
+                <a:cs typeface="Microsoft GothicNeo"/>
+              </a:rPr>
+              <a:t>최소값 </a:t>
+            </a:r>
+            <a:r>
+              <a:rPr lang="en-US" altLang="ko-KR" sz="1300" dirty="0">
+                <a:solidFill>
+                  <a:srgbClr val="C00000"/>
+                </a:solidFill>
+                <a:latin typeface="Microsoft GothicNeo"/>
+                <a:ea typeface="Microsoft GothicNeo"/>
+                <a:cs typeface="Microsoft GothicNeo"/>
+              </a:rPr>
+              <a:t>-999999</a:t>
+            </a:r>
+            <a:r>
+              <a:rPr lang="ko-KR" altLang="en-US" sz="1300" dirty="0">
+                <a:solidFill>
+                  <a:srgbClr val="C00000"/>
+                </a:solidFill>
+                <a:latin typeface="Microsoft GothicNeo"/>
+                <a:ea typeface="Microsoft GothicNeo"/>
+                <a:cs typeface="Microsoft GothicNeo"/>
+              </a:rPr>
+              <a:t> </a:t>
+            </a:r>
+            <a:r>
+              <a:rPr lang="ko-KR" altLang="en-US" sz="1300" dirty="0" err="1">
+                <a:solidFill>
+                  <a:srgbClr val="C00000"/>
+                </a:solidFill>
+                <a:latin typeface="Microsoft GothicNeo"/>
+                <a:ea typeface="Microsoft GothicNeo"/>
+                <a:cs typeface="Microsoft GothicNeo"/>
+              </a:rPr>
+              <a:t>결측치</a:t>
+            </a:r>
+            <a:r>
+              <a:rPr lang="ko-KR" altLang="en-US" sz="1300" dirty="0">
+                <a:latin typeface="Microsoft GothicNeo"/>
+                <a:ea typeface="Microsoft GothicNeo"/>
+                <a:cs typeface="Microsoft GothicNeo"/>
+              </a:rPr>
+              <a:t> 확인</a:t>
+            </a:r>
+            <a:endParaRPr lang="en-US" altLang="ko-KR" sz="1300" dirty="0">
+              <a:latin typeface="Microsoft GothicNeo"/>
+              <a:ea typeface="Microsoft GothicNeo"/>
+              <a:cs typeface="Microsoft GothicNeo"/>
+            </a:endParaRPr>
+          </a:p>
+          <a:p>
+            <a:pPr marL="400050" lvl="2" indent="228600">
+              <a:lnSpc>
+                <a:spcPct val="150000"/>
+              </a:lnSpc>
+              <a:buFont typeface="Wingdings,Sans-Serif"/>
+              <a:buChar char="§"/>
+            </a:pPr>
+            <a:r>
+              <a:rPr lang="en-US" altLang="ko-KR" sz="1300" dirty="0">
+                <a:latin typeface="Microsoft GothicNeo"/>
+                <a:ea typeface="Microsoft GothicNeo"/>
+                <a:cs typeface="Microsoft GothicNeo"/>
+              </a:rPr>
+              <a:t>var15 </a:t>
+            </a:r>
+            <a:r>
+              <a:rPr lang="ko-KR" altLang="en-US" sz="1300" dirty="0">
+                <a:latin typeface="Microsoft GothicNeo"/>
+                <a:ea typeface="Microsoft GothicNeo"/>
+                <a:cs typeface="Microsoft GothicNeo"/>
+              </a:rPr>
+              <a:t>값의 분포가 현실적인 </a:t>
+            </a:r>
+            <a:r>
+              <a:rPr lang="en-US" altLang="ko-KR" sz="1300" dirty="0">
+                <a:solidFill>
+                  <a:srgbClr val="C00000"/>
+                </a:solidFill>
+                <a:latin typeface="Microsoft GothicNeo"/>
+                <a:ea typeface="Microsoft GothicNeo"/>
+                <a:cs typeface="Microsoft GothicNeo"/>
+              </a:rPr>
+              <a:t>‘</a:t>
+            </a:r>
+            <a:r>
+              <a:rPr lang="ko-KR" altLang="en-US" sz="1300" dirty="0">
+                <a:solidFill>
+                  <a:srgbClr val="C00000"/>
+                </a:solidFill>
+                <a:latin typeface="Microsoft GothicNeo"/>
+                <a:ea typeface="Microsoft GothicNeo"/>
+                <a:cs typeface="Microsoft GothicNeo"/>
+              </a:rPr>
+              <a:t>나이</a:t>
+            </a:r>
+            <a:r>
+              <a:rPr lang="en-US" altLang="ko-KR" sz="1300" dirty="0">
+                <a:solidFill>
+                  <a:srgbClr val="C00000"/>
+                </a:solidFill>
+                <a:latin typeface="Microsoft GothicNeo"/>
+                <a:ea typeface="Microsoft GothicNeo"/>
+                <a:cs typeface="Microsoft GothicNeo"/>
+              </a:rPr>
+              <a:t>(Age)’</a:t>
+            </a:r>
+            <a:r>
+              <a:rPr lang="ko-KR" altLang="en-US" sz="1300" dirty="0">
+                <a:latin typeface="Microsoft GothicNeo"/>
+                <a:ea typeface="Microsoft GothicNeo"/>
+                <a:cs typeface="Microsoft GothicNeo"/>
+              </a:rPr>
+              <a:t> 범위에 해당</a:t>
+            </a:r>
+            <a:r>
+              <a:rPr lang="en-US" altLang="ko-KR" sz="1300" dirty="0">
+                <a:latin typeface="Microsoft GothicNeo"/>
+                <a:ea typeface="Microsoft GothicNeo"/>
+                <a:cs typeface="Microsoft GothicNeo"/>
+              </a:rPr>
+              <a:t>, </a:t>
+            </a:r>
+            <a:r>
+              <a:rPr lang="ko-KR" altLang="en-US" sz="1300" dirty="0">
+                <a:latin typeface="Microsoft GothicNeo"/>
+                <a:ea typeface="Microsoft GothicNeo"/>
+                <a:cs typeface="Microsoft GothicNeo"/>
+              </a:rPr>
+              <a:t>연속형 정수로 구성 ▶ </a:t>
+            </a:r>
+            <a:r>
+              <a:rPr lang="ko-KR" altLang="en-US" sz="1300" dirty="0">
+                <a:solidFill>
+                  <a:srgbClr val="C00000"/>
+                </a:solidFill>
+                <a:latin typeface="Microsoft GothicNeo"/>
+                <a:ea typeface="Microsoft GothicNeo"/>
+                <a:cs typeface="Microsoft GothicNeo"/>
+              </a:rPr>
+              <a:t>고객 특성 설명</a:t>
+            </a:r>
+            <a:endParaRPr lang="en-US" altLang="ko-KR" sz="1300" dirty="0">
+              <a:solidFill>
+                <a:srgbClr val="C00000"/>
+              </a:solidFill>
+              <a:latin typeface="Microsoft GothicNeo"/>
+              <a:ea typeface="Microsoft GothicNeo"/>
+              <a:cs typeface="Microsoft GothicNeo"/>
+            </a:endParaRPr>
+          </a:p>
+          <a:p>
+            <a:pPr marL="400050" lvl="2" indent="228600">
+              <a:lnSpc>
+                <a:spcPct val="150000"/>
+              </a:lnSpc>
+              <a:buFont typeface="Wingdings,Sans-Serif"/>
+              <a:buChar char="§"/>
+            </a:pPr>
+            <a:r>
+              <a:rPr lang="en-US" altLang="ko-KR" sz="1300" dirty="0">
+                <a:latin typeface="Microsoft GothicNeo"/>
+                <a:ea typeface="Microsoft GothicNeo"/>
+                <a:cs typeface="Microsoft GothicNeo"/>
+              </a:rPr>
+              <a:t>var38 </a:t>
+            </a:r>
+            <a:r>
+              <a:rPr lang="ko-KR" altLang="en-US" sz="1300" dirty="0">
+                <a:latin typeface="Microsoft GothicNeo"/>
+                <a:ea typeface="Microsoft GothicNeo"/>
+                <a:cs typeface="Microsoft GothicNeo"/>
+              </a:rPr>
+              <a:t>피처의 분포 분석 결과 </a:t>
+            </a:r>
+            <a:r>
+              <a:rPr lang="ko-KR" altLang="en-US" sz="1300" b="1" dirty="0">
+                <a:latin typeface="Microsoft GothicNeo"/>
+                <a:ea typeface="Microsoft GothicNeo"/>
+                <a:cs typeface="Microsoft GothicNeo"/>
+              </a:rPr>
+              <a:t>특정 값</a:t>
+            </a:r>
+            <a:r>
+              <a:rPr lang="en-US" altLang="ko-KR" sz="1300" b="1" dirty="0">
+                <a:latin typeface="Microsoft GothicNeo"/>
+                <a:ea typeface="Microsoft GothicNeo"/>
+                <a:cs typeface="Microsoft GothicNeo"/>
+              </a:rPr>
+              <a:t>*</a:t>
+            </a:r>
+            <a:r>
+              <a:rPr lang="ko-KR" altLang="en-US" sz="1300" dirty="0">
+                <a:latin typeface="Microsoft GothicNeo"/>
+                <a:ea typeface="Microsoft GothicNeo"/>
+                <a:cs typeface="Microsoft GothicNeo"/>
+              </a:rPr>
+              <a:t>에 데이터가 집중되는 패턴 확인</a:t>
+            </a:r>
+            <a:r>
+              <a:rPr lang="ko-KR" altLang="en-US" sz="1300" dirty="0">
+                <a:solidFill>
+                  <a:srgbClr val="C00000"/>
+                </a:solidFill>
+                <a:latin typeface="Microsoft GothicNeo"/>
+                <a:ea typeface="Microsoft GothicNeo"/>
+                <a:cs typeface="Microsoft GothicNeo"/>
+              </a:rPr>
+              <a:t> </a:t>
+            </a:r>
+            <a:r>
+              <a:rPr lang="ko-KR" altLang="en-US" sz="1300" dirty="0">
+                <a:latin typeface="Microsoft GothicNeo"/>
+                <a:ea typeface="Microsoft GothicNeo"/>
+                <a:cs typeface="Microsoft GothicNeo"/>
+              </a:rPr>
+              <a:t>▶ </a:t>
+            </a:r>
+            <a:r>
+              <a:rPr lang="ko-KR" altLang="en-US" sz="1300" dirty="0" err="1">
+                <a:solidFill>
+                  <a:srgbClr val="C00000"/>
+                </a:solidFill>
+                <a:latin typeface="Microsoft GothicNeo"/>
+                <a:ea typeface="Microsoft GothicNeo"/>
+                <a:cs typeface="Microsoft GothicNeo"/>
+              </a:rPr>
+              <a:t>결측치</a:t>
+            </a:r>
+            <a:r>
+              <a:rPr lang="ko-KR" altLang="en-US" sz="1300" dirty="0">
+                <a:solidFill>
+                  <a:srgbClr val="C00000"/>
+                </a:solidFill>
+                <a:latin typeface="Microsoft GothicNeo"/>
+                <a:ea typeface="Microsoft GothicNeo"/>
+                <a:cs typeface="Microsoft GothicNeo"/>
+              </a:rPr>
+              <a:t> </a:t>
+            </a:r>
+            <a:r>
+              <a:rPr lang="ko-KR" altLang="en-US" sz="1300" dirty="0" err="1">
+                <a:solidFill>
+                  <a:srgbClr val="C00000"/>
+                </a:solidFill>
+                <a:latin typeface="Microsoft GothicNeo"/>
+                <a:ea typeface="Microsoft GothicNeo"/>
+                <a:cs typeface="Microsoft GothicNeo"/>
+              </a:rPr>
+              <a:t>대체값</a:t>
+            </a:r>
+            <a:r>
+              <a:rPr lang="en-US" altLang="ko-KR" sz="1300" dirty="0">
+                <a:solidFill>
+                  <a:srgbClr val="C00000"/>
+                </a:solidFill>
+                <a:latin typeface="Microsoft GothicNeo"/>
+                <a:ea typeface="Microsoft GothicNeo"/>
+                <a:cs typeface="Microsoft GothicNeo"/>
+              </a:rPr>
+              <a:t>(placeholder)</a:t>
+            </a:r>
+            <a:r>
+              <a:rPr lang="ko-KR" altLang="en-US" sz="1300" dirty="0">
+                <a:solidFill>
+                  <a:srgbClr val="C00000"/>
+                </a:solidFill>
+                <a:latin typeface="Microsoft GothicNeo"/>
+                <a:ea typeface="Microsoft GothicNeo"/>
+                <a:cs typeface="Microsoft GothicNeo"/>
+              </a:rPr>
+              <a:t> 시사</a:t>
+            </a:r>
+            <a:endParaRPr lang="en-US" altLang="ko-KR" sz="1300" dirty="0">
+              <a:solidFill>
+                <a:srgbClr val="C00000"/>
+              </a:solidFill>
+              <a:latin typeface="Microsoft GothicNeo"/>
+              <a:ea typeface="Microsoft GothicNeo"/>
+              <a:cs typeface="Microsoft GothicNeo"/>
+            </a:endParaRPr>
+          </a:p>
+          <a:p>
+            <a:pPr marL="800100" lvl="3" indent="-228600">
+              <a:lnSpc>
+                <a:spcPct val="150000"/>
+              </a:lnSpc>
+              <a:buFont typeface="Calibri"/>
+              <a:buChar char="-"/>
+            </a:pPr>
+            <a:r>
+              <a:rPr lang="en-US" altLang="ko-KR" sz="1200" dirty="0">
+                <a:latin typeface="Microsoft GothicNeo"/>
+                <a:ea typeface="Microsoft GothicNeo"/>
+                <a:cs typeface="Microsoft GothicNeo"/>
+              </a:rPr>
+              <a:t>var15 </a:t>
+            </a:r>
+            <a:r>
+              <a:rPr lang="ko-KR" altLang="en-US" sz="1200" dirty="0">
+                <a:latin typeface="Microsoft GothicNeo"/>
+                <a:ea typeface="Microsoft GothicNeo"/>
+                <a:cs typeface="Microsoft GothicNeo"/>
+              </a:rPr>
+              <a:t>나이 추정 변수에서 전체 분포는 </a:t>
+            </a:r>
+            <a:r>
+              <a:rPr lang="en-US" altLang="ko-KR" sz="1200" dirty="0">
+                <a:latin typeface="Microsoft GothicNeo"/>
+                <a:ea typeface="Microsoft GothicNeo"/>
+                <a:cs typeface="Microsoft GothicNeo"/>
+              </a:rPr>
+              <a:t>23~40</a:t>
+            </a:r>
+            <a:r>
+              <a:rPr lang="ko-KR" altLang="en-US" sz="1200" dirty="0">
+                <a:latin typeface="Microsoft GothicNeo"/>
+                <a:ea typeface="Microsoft GothicNeo"/>
+                <a:cs typeface="Microsoft GothicNeo"/>
+              </a:rPr>
+              <a:t>세 구간에 집중</a:t>
+            </a:r>
+            <a:r>
+              <a:rPr lang="en-US" altLang="ko-KR" sz="1200" dirty="0">
+                <a:latin typeface="Microsoft GothicNeo"/>
+                <a:ea typeface="Microsoft GothicNeo"/>
+                <a:cs typeface="Microsoft GothicNeo"/>
+              </a:rPr>
+              <a:t>, </a:t>
+            </a:r>
+            <a:r>
+              <a:rPr lang="en-US" altLang="ko-KR" sz="1200" dirty="0">
+                <a:solidFill>
+                  <a:srgbClr val="EC0000"/>
+                </a:solidFill>
+                <a:latin typeface="Microsoft GothicNeo"/>
+                <a:ea typeface="Microsoft GothicNeo"/>
+                <a:cs typeface="Microsoft GothicNeo"/>
+              </a:rPr>
+              <a:t>100</a:t>
+            </a:r>
+            <a:r>
+              <a:rPr lang="ko-KR" altLang="en-US" sz="1200" dirty="0">
+                <a:solidFill>
+                  <a:srgbClr val="EC0000"/>
+                </a:solidFill>
+                <a:latin typeface="Microsoft GothicNeo"/>
+                <a:ea typeface="Microsoft GothicNeo"/>
+                <a:cs typeface="Microsoft GothicNeo"/>
+              </a:rPr>
+              <a:t>세 이상 값은 총 </a:t>
+            </a:r>
+            <a:r>
+              <a:rPr lang="en-US" altLang="ko-KR" sz="1200" dirty="0">
+                <a:solidFill>
+                  <a:srgbClr val="EC0000"/>
+                </a:solidFill>
+                <a:latin typeface="Microsoft GothicNeo"/>
+                <a:ea typeface="Microsoft GothicNeo"/>
+                <a:cs typeface="Microsoft GothicNeo"/>
+              </a:rPr>
+              <a:t>8</a:t>
+            </a:r>
+            <a:r>
+              <a:rPr lang="ko-KR" altLang="en-US" sz="1200" dirty="0">
+                <a:solidFill>
+                  <a:srgbClr val="EC0000"/>
+                </a:solidFill>
+                <a:latin typeface="Microsoft GothicNeo"/>
+                <a:ea typeface="Microsoft GothicNeo"/>
+                <a:cs typeface="Microsoft GothicNeo"/>
+              </a:rPr>
+              <a:t>건</a:t>
+            </a:r>
+            <a:r>
+              <a:rPr lang="ko-KR" altLang="en-US" sz="1200" dirty="0">
+                <a:latin typeface="Microsoft GothicNeo"/>
+                <a:ea typeface="Microsoft GothicNeo"/>
+                <a:cs typeface="Microsoft GothicNeo"/>
+              </a:rPr>
+              <a:t>으로 매우 드물게 나타나 이상치로 판단</a:t>
+            </a:r>
+            <a:endParaRPr lang="en-US" altLang="ko-KR" sz="1200" dirty="0">
+              <a:latin typeface="Microsoft GothicNeo"/>
+              <a:ea typeface="Microsoft GothicNeo"/>
+              <a:cs typeface="Microsoft GothicNeo"/>
+            </a:endParaRPr>
+          </a:p>
+          <a:p>
+            <a:pPr marL="800100" lvl="3" indent="-228600">
+              <a:lnSpc>
+                <a:spcPct val="150000"/>
+              </a:lnSpc>
+              <a:buFont typeface="Calibri"/>
+              <a:buChar char="-"/>
+            </a:pPr>
+            <a:r>
+              <a:rPr lang="en-US" altLang="ko-KR" sz="1200" dirty="0">
+                <a:latin typeface="Microsoft GothicNeo"/>
+                <a:ea typeface="Microsoft GothicNeo"/>
+                <a:cs typeface="Microsoft GothicNeo"/>
+              </a:rPr>
+              <a:t>var38 </a:t>
+            </a:r>
+            <a:r>
+              <a:rPr lang="ko-KR" altLang="en-US" sz="1200" dirty="0">
+                <a:latin typeface="Microsoft GothicNeo"/>
+                <a:ea typeface="Microsoft GothicNeo"/>
+                <a:cs typeface="Microsoft GothicNeo"/>
+              </a:rPr>
+              <a:t>특정 값</a:t>
+            </a:r>
+            <a:r>
+              <a:rPr lang="en-US" altLang="ko-KR" sz="1200" dirty="0">
+                <a:latin typeface="Microsoft GothicNeo"/>
+                <a:ea typeface="Microsoft GothicNeo"/>
+                <a:cs typeface="Microsoft GothicNeo"/>
+              </a:rPr>
+              <a:t>(117,310)</a:t>
+            </a:r>
+            <a:r>
+              <a:rPr lang="ko-KR" altLang="en-US" sz="1200" dirty="0">
+                <a:latin typeface="Microsoft GothicNeo"/>
+                <a:ea typeface="Microsoft GothicNeo"/>
+                <a:cs typeface="Microsoft GothicNeo"/>
+              </a:rPr>
+              <a:t>에 데이터가 집중되는 패턴 확인</a:t>
+            </a:r>
+            <a:r>
+              <a:rPr lang="en-US" altLang="ko-KR" sz="1200" dirty="0">
+                <a:latin typeface="Microsoft GothicNeo"/>
+                <a:ea typeface="Microsoft GothicNeo"/>
+                <a:cs typeface="Microsoft GothicNeo"/>
+              </a:rPr>
+              <a:t>. </a:t>
+            </a:r>
+            <a:r>
+              <a:rPr lang="ko-KR" altLang="en-US" sz="1200" dirty="0" err="1">
+                <a:latin typeface="Microsoft GothicNeo"/>
+                <a:ea typeface="Microsoft GothicNeo"/>
+                <a:cs typeface="Microsoft GothicNeo"/>
+              </a:rPr>
+              <a:t>해당값은</a:t>
+            </a:r>
+            <a:r>
+              <a:rPr lang="ko-KR" altLang="en-US" sz="1200" dirty="0">
+                <a:latin typeface="Microsoft GothicNeo"/>
+                <a:ea typeface="Microsoft GothicNeo"/>
+                <a:cs typeface="Microsoft GothicNeo"/>
+              </a:rPr>
+              <a:t> 전체 데이터 </a:t>
+            </a:r>
+            <a:r>
+              <a:rPr lang="en-US" altLang="ko-KR" sz="1200" dirty="0">
+                <a:latin typeface="Microsoft GothicNeo"/>
+                <a:ea typeface="Microsoft GothicNeo"/>
+                <a:cs typeface="Microsoft GothicNeo"/>
+              </a:rPr>
+              <a:t>14,868</a:t>
+            </a:r>
+            <a:r>
+              <a:rPr lang="ko-KR" altLang="en-US" sz="1200" dirty="0">
+                <a:latin typeface="Microsoft GothicNeo"/>
+                <a:ea typeface="Microsoft GothicNeo"/>
+                <a:cs typeface="Microsoft GothicNeo"/>
+              </a:rPr>
+              <a:t>건으로 가장 높은 빈도를 보임</a:t>
+            </a:r>
+          </a:p>
+        </p:txBody>
+      </p:sp>
+      <p:sp>
+        <p:nvSpPr>
+          <p:cNvPr id="4" name="직사각형 3">
+            <a:extLst>
+              <a:ext uri="{FF2B5EF4-FFF2-40B4-BE49-F238E27FC236}">
+                <a16:creationId xmlns:a16="http://schemas.microsoft.com/office/drawing/2014/main" id="{5FF6756E-77CA-5637-8689-1D9ECA0367C2}"/>
+              </a:ext>
+            </a:extLst>
+          </p:cNvPr>
+          <p:cNvSpPr/>
+          <p:nvPr/>
+        </p:nvSpPr>
+        <p:spPr>
+          <a:xfrm>
+            <a:off x="444500" y="1026583"/>
+            <a:ext cx="63499" cy="1291166"/>
+          </a:xfrm>
+          <a:prstGeom prst="rect">
+            <a:avLst/>
+          </a:prstGeom>
+          <a:solidFill>
+            <a:srgbClr val="C00000"/>
+          </a:solidFill>
+          <a:ln>
+            <a:noFill/>
+          </a:ln>
+        </p:spPr>
+        <p:style>
+          <a:lnRef idx="2">
+            <a:schemeClr val="accent1">
+              <a:shade val="15000"/>
+            </a:schemeClr>
+          </a:lnRef>
+          <a:fillRef idx="1">
+            <a:schemeClr val="accent1"/>
+          </a:fillRef>
+          <a:effectRef idx="0">
+            <a:schemeClr val="accent1"/>
+          </a:effectRef>
+          <a:fontRef idx="minor">
+            <a:schemeClr val="lt1"/>
+          </a:fontRef>
+        </p:style>
+        <p:txBody>
+          <a:bodyPr rtlCol="0" anchor="ctr"/>
+          <a:lstStyle/>
+          <a:p>
+            <a:pPr algn="ctr"/>
+            <a:endParaRPr lang="ko-KR" altLang="en-US"/>
+          </a:p>
+        </p:txBody>
+      </p:sp>
+      <p:pic>
+        <p:nvPicPr>
+          <p:cNvPr id="5" name="그림 4" descr="File:Santander Logo.PNG - Wikimedia Commons">
+            <a:extLst>
+              <a:ext uri="{FF2B5EF4-FFF2-40B4-BE49-F238E27FC236}">
+                <a16:creationId xmlns:a16="http://schemas.microsoft.com/office/drawing/2014/main" id="{3E7983DF-22A9-4FD8-0F6D-CB9879F994F6}"/>
+              </a:ext>
+            </a:extLst>
+          </p:cNvPr>
+          <p:cNvPicPr>
+            <a:picLocks noChangeAspect="1"/>
+          </p:cNvPicPr>
+          <p:nvPr/>
+        </p:nvPicPr>
+        <p:blipFill>
+          <a:blip r:embed="rId2"/>
+          <a:stretch>
+            <a:fillRect/>
+          </a:stretch>
+        </p:blipFill>
+        <p:spPr>
+          <a:xfrm>
+            <a:off x="3" y="6197079"/>
+            <a:ext cx="1767252" cy="662893"/>
+          </a:xfrm>
+          <a:prstGeom prst="rect">
+            <a:avLst/>
+          </a:prstGeom>
+        </p:spPr>
+      </p:pic>
+      <p:sp>
+        <p:nvSpPr>
+          <p:cNvPr id="15" name="TextBox 14">
+            <a:extLst>
+              <a:ext uri="{FF2B5EF4-FFF2-40B4-BE49-F238E27FC236}">
+                <a16:creationId xmlns:a16="http://schemas.microsoft.com/office/drawing/2014/main" id="{1735406E-9748-5AB5-925E-5A3648B901F3}"/>
+              </a:ext>
+            </a:extLst>
+          </p:cNvPr>
+          <p:cNvSpPr txBox="1"/>
+          <p:nvPr/>
+        </p:nvSpPr>
+        <p:spPr>
+          <a:xfrm>
+            <a:off x="883629" y="3099251"/>
+            <a:ext cx="6422230" cy="261610"/>
+          </a:xfrm>
+          <a:prstGeom prst="rect">
+            <a:avLst/>
+          </a:prstGeom>
+          <a:noFill/>
+        </p:spPr>
+        <p:txBody>
+          <a:bodyPr wrap="square">
+            <a:spAutoFit/>
+          </a:bodyPr>
+          <a:lstStyle/>
+          <a:p>
+            <a:pPr algn="ctr"/>
+            <a:r>
+              <a:rPr lang="en-US" altLang="ko-KR" sz="1100" dirty="0">
+                <a:latin typeface="Microsoft GothicNeo" panose="020B0500000101010101" pitchFamily="50" charset="-127"/>
+                <a:ea typeface="Microsoft GothicNeo" panose="020B0500000101010101" pitchFamily="50" charset="-127"/>
+                <a:cs typeface="Microsoft GothicNeo" panose="020B0500000101010101" pitchFamily="50" charset="-127"/>
+              </a:rPr>
+              <a:t>[ </a:t>
+            </a:r>
+            <a:r>
+              <a:rPr lang="ko-KR" altLang="en-US" sz="1100" dirty="0">
+                <a:latin typeface="Microsoft GothicNeo" panose="020B0500000101010101" pitchFamily="50" charset="-127"/>
+                <a:ea typeface="Microsoft GothicNeo" panose="020B0500000101010101" pitchFamily="50" charset="-127"/>
+                <a:cs typeface="Microsoft GothicNeo" panose="020B0500000101010101" pitchFamily="50" charset="-127"/>
+              </a:rPr>
+              <a:t>그림 </a:t>
+            </a:r>
+            <a:r>
+              <a:rPr lang="en-US" altLang="ko-KR" sz="1100" dirty="0">
+                <a:latin typeface="Microsoft GothicNeo" panose="020B0500000101010101" pitchFamily="50" charset="-127"/>
+                <a:ea typeface="Microsoft GothicNeo" panose="020B0500000101010101" pitchFamily="50" charset="-127"/>
+                <a:cs typeface="Microsoft GothicNeo" panose="020B0500000101010101" pitchFamily="50" charset="-127"/>
+              </a:rPr>
+              <a:t>2.12 var15(</a:t>
+            </a:r>
+            <a:r>
+              <a:rPr lang="ko-KR" altLang="en-US" sz="1100" dirty="0">
+                <a:latin typeface="Microsoft GothicNeo" panose="020B0500000101010101" pitchFamily="50" charset="-127"/>
+                <a:ea typeface="Microsoft GothicNeo" panose="020B0500000101010101" pitchFamily="50" charset="-127"/>
+                <a:cs typeface="Microsoft GothicNeo" panose="020B0500000101010101" pitchFamily="50" charset="-127"/>
+              </a:rPr>
+              <a:t>나이추정</a:t>
+            </a:r>
+            <a:r>
+              <a:rPr lang="en-US" altLang="ko-KR" sz="1100" dirty="0">
+                <a:latin typeface="Microsoft GothicNeo" panose="020B0500000101010101" pitchFamily="50" charset="-127"/>
+                <a:ea typeface="Microsoft GothicNeo" panose="020B0500000101010101" pitchFamily="50" charset="-127"/>
+                <a:cs typeface="Microsoft GothicNeo" panose="020B0500000101010101" pitchFamily="50" charset="-127"/>
+              </a:rPr>
+              <a:t>) </a:t>
+            </a:r>
+            <a:r>
+              <a:rPr lang="ko-KR" altLang="en-US" sz="1100" dirty="0">
+                <a:latin typeface="Microsoft GothicNeo" panose="020B0500000101010101" pitchFamily="50" charset="-127"/>
+                <a:ea typeface="Microsoft GothicNeo" panose="020B0500000101010101" pitchFamily="50" charset="-127"/>
+                <a:cs typeface="Microsoft GothicNeo" panose="020B0500000101010101" pitchFamily="50" charset="-127"/>
+              </a:rPr>
+              <a:t>피처의 분포 히스토그램 </a:t>
+            </a:r>
+            <a:r>
+              <a:rPr lang="en-US" altLang="ko-KR" sz="1100" dirty="0">
+                <a:latin typeface="Microsoft GothicNeo" panose="020B0500000101010101" pitchFamily="50" charset="-127"/>
+                <a:ea typeface="Microsoft GothicNeo" panose="020B0500000101010101" pitchFamily="50" charset="-127"/>
+                <a:cs typeface="Microsoft GothicNeo" panose="020B0500000101010101" pitchFamily="50" charset="-127"/>
+              </a:rPr>
+              <a:t>]</a:t>
+            </a:r>
+            <a:endParaRPr lang="ko-KR" altLang="en-US" sz="1100" dirty="0">
+              <a:latin typeface="Microsoft GothicNeo" panose="020B0500000101010101" pitchFamily="50" charset="-127"/>
+              <a:ea typeface="Microsoft GothicNeo" panose="020B0500000101010101" pitchFamily="50" charset="-127"/>
+              <a:cs typeface="Microsoft GothicNeo" panose="020B0500000101010101" pitchFamily="50" charset="-127"/>
+            </a:endParaRPr>
+          </a:p>
+        </p:txBody>
+      </p:sp>
+      <p:sp>
+        <p:nvSpPr>
+          <p:cNvPr id="11" name="TextBox 10">
+            <a:extLst>
+              <a:ext uri="{FF2B5EF4-FFF2-40B4-BE49-F238E27FC236}">
+                <a16:creationId xmlns:a16="http://schemas.microsoft.com/office/drawing/2014/main" id="{B24CE4C2-FA0E-698F-02A5-7A8E82D1CFFB}"/>
+              </a:ext>
+            </a:extLst>
+          </p:cNvPr>
+          <p:cNvSpPr txBox="1"/>
+          <p:nvPr/>
+        </p:nvSpPr>
+        <p:spPr>
+          <a:xfrm>
+            <a:off x="5459835" y="3156110"/>
+            <a:ext cx="6422230" cy="261610"/>
+          </a:xfrm>
+          <a:prstGeom prst="rect">
+            <a:avLst/>
+          </a:prstGeom>
+          <a:noFill/>
+        </p:spPr>
+        <p:txBody>
+          <a:bodyPr wrap="square">
+            <a:spAutoFit/>
+          </a:bodyPr>
+          <a:lstStyle/>
+          <a:p>
+            <a:pPr algn="ctr"/>
+            <a:r>
+              <a:rPr lang="en-US" altLang="ko-KR" sz="1100" dirty="0">
+                <a:latin typeface="Microsoft GothicNeo" panose="020B0500000101010101" pitchFamily="50" charset="-127"/>
+                <a:ea typeface="Microsoft GothicNeo" panose="020B0500000101010101" pitchFamily="50" charset="-127"/>
+                <a:cs typeface="Microsoft GothicNeo" panose="020B0500000101010101" pitchFamily="50" charset="-127"/>
+              </a:rPr>
+              <a:t>[ </a:t>
+            </a:r>
+            <a:r>
+              <a:rPr lang="ko-KR" altLang="en-US" sz="1100" dirty="0">
+                <a:latin typeface="Microsoft GothicNeo" panose="020B0500000101010101" pitchFamily="50" charset="-127"/>
+                <a:ea typeface="Microsoft GothicNeo" panose="020B0500000101010101" pitchFamily="50" charset="-127"/>
+                <a:cs typeface="Microsoft GothicNeo" panose="020B0500000101010101" pitchFamily="50" charset="-127"/>
+              </a:rPr>
+              <a:t>그림 </a:t>
+            </a:r>
+            <a:r>
+              <a:rPr lang="en-US" altLang="ko-KR" sz="1100" dirty="0">
+                <a:latin typeface="Microsoft GothicNeo" panose="020B0500000101010101" pitchFamily="50" charset="-127"/>
+                <a:ea typeface="Microsoft GothicNeo" panose="020B0500000101010101" pitchFamily="50" charset="-127"/>
+                <a:cs typeface="Microsoft GothicNeo" panose="020B0500000101010101" pitchFamily="50" charset="-127"/>
+              </a:rPr>
+              <a:t>2.13 var38 </a:t>
+            </a:r>
+            <a:r>
+              <a:rPr lang="ko-KR" altLang="en-US" sz="1100" dirty="0">
+                <a:latin typeface="Microsoft GothicNeo" panose="020B0500000101010101" pitchFamily="50" charset="-127"/>
+                <a:ea typeface="Microsoft GothicNeo" panose="020B0500000101010101" pitchFamily="50" charset="-127"/>
+                <a:cs typeface="Microsoft GothicNeo" panose="020B0500000101010101" pitchFamily="50" charset="-127"/>
+              </a:rPr>
+              <a:t>피처의 분포 중 </a:t>
+            </a:r>
+            <a:r>
+              <a:rPr lang="ko-KR" altLang="en-US" sz="1100" dirty="0" err="1">
+                <a:latin typeface="Microsoft GothicNeo" panose="020B0500000101010101" pitchFamily="50" charset="-127"/>
+                <a:ea typeface="Microsoft GothicNeo" panose="020B0500000101010101" pitchFamily="50" charset="-127"/>
+                <a:cs typeface="Microsoft GothicNeo" panose="020B0500000101010101" pitchFamily="50" charset="-127"/>
+              </a:rPr>
+              <a:t>특정값</a:t>
+            </a:r>
+            <a:r>
+              <a:rPr lang="ko-KR" altLang="en-US" sz="1100" dirty="0">
+                <a:latin typeface="Microsoft GothicNeo" panose="020B0500000101010101" pitchFamily="50" charset="-127"/>
+                <a:ea typeface="Microsoft GothicNeo" panose="020B0500000101010101" pitchFamily="50" charset="-127"/>
+                <a:cs typeface="Microsoft GothicNeo" panose="020B0500000101010101" pitchFamily="50" charset="-127"/>
+              </a:rPr>
+              <a:t> 데이터 집중 확인 </a:t>
+            </a:r>
+            <a:r>
+              <a:rPr lang="en-US" altLang="ko-KR" sz="1100" dirty="0">
+                <a:latin typeface="Microsoft GothicNeo" panose="020B0500000101010101" pitchFamily="50" charset="-127"/>
+                <a:ea typeface="Microsoft GothicNeo" panose="020B0500000101010101" pitchFamily="50" charset="-127"/>
+                <a:cs typeface="Microsoft GothicNeo" panose="020B0500000101010101" pitchFamily="50" charset="-127"/>
+              </a:rPr>
+              <a:t>]</a:t>
+            </a:r>
+            <a:endParaRPr lang="ko-KR" altLang="en-US" sz="1100" dirty="0">
+              <a:latin typeface="Microsoft GothicNeo" panose="020B0500000101010101" pitchFamily="50" charset="-127"/>
+              <a:ea typeface="Microsoft GothicNeo" panose="020B0500000101010101" pitchFamily="50" charset="-127"/>
+              <a:cs typeface="Microsoft GothicNeo" panose="020B0500000101010101" pitchFamily="50" charset="-127"/>
+            </a:endParaRPr>
+          </a:p>
+        </p:txBody>
+      </p:sp>
+      <p:pic>
+        <p:nvPicPr>
+          <p:cNvPr id="9" name="그림 8">
+            <a:extLst>
+              <a:ext uri="{FF2B5EF4-FFF2-40B4-BE49-F238E27FC236}">
+                <a16:creationId xmlns:a16="http://schemas.microsoft.com/office/drawing/2014/main" id="{3EB9A398-BAB0-9A94-F619-A783BF74916C}"/>
+              </a:ext>
+            </a:extLst>
+          </p:cNvPr>
+          <p:cNvPicPr>
+            <a:picLocks noChangeAspect="1"/>
+          </p:cNvPicPr>
+          <p:nvPr/>
+        </p:nvPicPr>
+        <p:blipFill>
+          <a:blip r:embed="rId3"/>
+          <a:stretch>
+            <a:fillRect/>
+          </a:stretch>
+        </p:blipFill>
+        <p:spPr>
+          <a:xfrm>
+            <a:off x="1959935" y="3387406"/>
+            <a:ext cx="4061980" cy="2875085"/>
+          </a:xfrm>
+          <a:prstGeom prst="rect">
+            <a:avLst/>
+          </a:prstGeom>
+        </p:spPr>
+      </p:pic>
+      <p:pic>
+        <p:nvPicPr>
+          <p:cNvPr id="14" name="그림 13">
+            <a:extLst>
+              <a:ext uri="{FF2B5EF4-FFF2-40B4-BE49-F238E27FC236}">
+                <a16:creationId xmlns:a16="http://schemas.microsoft.com/office/drawing/2014/main" id="{2EDB3B0F-46D9-A476-0F2F-C2CA458150D6}"/>
+              </a:ext>
+            </a:extLst>
+          </p:cNvPr>
+          <p:cNvPicPr>
+            <a:picLocks noChangeAspect="1"/>
+          </p:cNvPicPr>
+          <p:nvPr/>
+        </p:nvPicPr>
+        <p:blipFill>
+          <a:blip r:embed="rId4"/>
+          <a:stretch>
+            <a:fillRect/>
+          </a:stretch>
+        </p:blipFill>
+        <p:spPr>
+          <a:xfrm>
+            <a:off x="6597700" y="3436088"/>
+            <a:ext cx="4146501" cy="2826403"/>
+          </a:xfrm>
+          <a:prstGeom prst="rect">
+            <a:avLst/>
+          </a:prstGeom>
+        </p:spPr>
+      </p:pic>
+    </p:spTree>
+    <p:extLst>
+      <p:ext uri="{BB962C8B-B14F-4D97-AF65-F5344CB8AC3E}">
+        <p14:creationId xmlns:p14="http://schemas.microsoft.com/office/powerpoint/2010/main" val="568982302"/>
+      </p:ext>
+    </p:extLst>
+  </p:cSld>
+  <p:clrMapOvr>
+    <a:masterClrMapping/>
+  </p:clrMapOvr>
+</p:sld>
+</file>
+
+<file path=ppt/slides/slide18.xml><?xml version="1.0" encoding="utf-8"?>
 <p:sld xmlns:a="http://schemas.openxmlformats.org/drawingml/2006/main" xmlns:r="http://schemas.openxmlformats.org/officeDocument/2006/relationships" xmlns:p="http://schemas.openxmlformats.org/presentationml/2006/main">
   <p:cSld>
     <p:spTree>
